--- a/presentation/Bellabeat_Marketing_Presentation.pptx
+++ b/presentation/Bellabeat_Marketing_Presentation.pptx
@@ -14,12 +14,8 @@
     <p:sldId id="262" r:id="rId13"/>
     <p:sldId id="263" r:id="rId14"/>
     <p:sldId id="264" r:id="rId15"/>
-    <p:sldId id="265" r:id="rId16"/>
-    <p:sldId id="266" r:id="rId17"/>
-    <p:sldId id="267" r:id="rId18"/>
-    <p:sldId id="268" r:id="rId19"/>
   </p:sldIdLst>
-  <p:sldSz cx="12192000" cy="6858000" type="screen4x3"/>
+  <p:sldSz cx="12191695" cy="6858000" type="screen4x3"/>
   <p:notesSz cx="6858000" cy="9144000"/>
   <p:defaultTextStyle>
     <a:defPPr>
@@ -3093,14 +3089,6 @@
 <file path=ppt/slides/slide1.xml><?xml version="1.0" encoding="utf-8"?>
 <p:sld xmlns:a="http://schemas.openxmlformats.org/drawingml/2006/main" xmlns:p="http://schemas.openxmlformats.org/presentationml/2006/main" xmlns:r="http://schemas.openxmlformats.org/officeDocument/2006/relationships">
   <p:cSld>
-    <p:bg>
-      <p:bgPr>
-        <a:solidFill>
-          <a:srgbClr val="FFFFFF"/>
-        </a:solidFill>
-        <a:effectLst/>
-      </p:bgPr>
-    </p:bg>
     <p:spTree>
       <p:nvGrpSpPr>
         <p:cNvPr id="1" name=""/>
@@ -3108,1008 +3096,26 @@
         <p:nvPr/>
       </p:nvGrpSpPr>
       <p:grpSpPr/>
-      <p:pic>
-        <p:nvPicPr>
-          <p:cNvPr id="2" name="Picture 1" descr="image.png"/>
-          <p:cNvPicPr>
-            <a:picLocks noChangeAspect="1"/>
-          </p:cNvPicPr>
+      <p:sp>
+        <p:nvSpPr>
+          <p:cNvPr id="2" name="Rectangle 1"/>
+          <p:cNvSpPr/>
           <p:nvPr/>
-        </p:nvPicPr>
-        <p:blipFill>
-          <a:blip r:embed="rId2"/>
-          <a:stretch>
-            <a:fillRect/>
-          </a:stretch>
-        </p:blipFill>
+        </p:nvSpPr>
         <p:spPr>
           <a:xfrm>
             <a:off x="0" y="0"/>
-            <a:ext cx="12192000" cy="6858000"/>
+            <a:ext cx="12191695" cy="6858000"/>
           </a:xfrm>
           <a:prstGeom prst="rect">
             <a:avLst/>
           </a:prstGeom>
-        </p:spPr>
-      </p:pic>
-      <p:sp>
-        <p:nvSpPr>
-          <p:cNvPr id="3" name="TextBox 2"/>
-          <p:cNvSpPr txBox="1"/>
-          <p:nvPr/>
-        </p:nvSpPr>
-        <p:spPr>
-          <a:xfrm>
-            <a:off x="295275" y="2236589"/>
-            <a:ext cx="11601450" cy="1462980"/>
-          </a:xfrm>
-          <a:prstGeom prst="rect">
-            <a:avLst/>
-          </a:prstGeom>
-          <a:noFill/>
-        </p:spPr>
-        <p:txBody>
-          <a:bodyPr wrap="square" lIns="0" rIns="0" tIns="0" bIns="0" anchor="t">
-            <a:spAutoFit/>
-          </a:bodyPr>
-          <a:lstStyle/>
-          <a:p>
-            <a:pPr algn="ctr">
-              <a:lnSpc>
-                <a:spcPts val="5759"/>
-              </a:lnSpc>
-            </a:pPr>
-            <a:r>
-              <a:rPr b="1" sz="4800" i="0" u="none">
-                <a:solidFill>
-                  <a:srgbClr val="2D3748"/>
-                </a:solidFill>
-                <a:latin typeface="Playfair Display"/>
-              </a:rPr>
-              <a:t>Analisis Tren Penggunaan Smart Device</a:t>
-            </a:r>
-          </a:p>
-        </p:txBody>
-      </p:sp>
-      <p:sp>
-        <p:nvSpPr>
-          <p:cNvPr id="4" name="TextBox 3"/>
-          <p:cNvSpPr txBox="1"/>
-          <p:nvPr/>
-        </p:nvSpPr>
-        <p:spPr>
-          <a:xfrm>
-            <a:off x="2286000" y="3890069"/>
-            <a:ext cx="7620000" cy="731341"/>
-          </a:xfrm>
-          <a:prstGeom prst="rect">
-            <a:avLst/>
-          </a:prstGeom>
-          <a:noFill/>
-        </p:spPr>
-        <p:txBody>
-          <a:bodyPr wrap="square" lIns="0" rIns="0" tIns="0" bIns="0" anchor="t">
-            <a:spAutoFit/>
-          </a:bodyPr>
-          <a:lstStyle/>
-          <a:p>
-            <a:pPr algn="ctr">
-              <a:lnSpc>
-                <a:spcPts val="2879"/>
-              </a:lnSpc>
-            </a:pPr>
-            <a:r>
-              <a:rPr b="0" sz="1800" i="0" u="none">
-                <a:solidFill>
-                  <a:srgbClr val="718096"/>
-                </a:solidFill>
-                <a:latin typeface="DM Sans"/>
-              </a:rPr>
-              <a:t>Menerjemahkan Data Menjadi Peluang Pemasaran Strategis untuk Bellabeat</a:t>
-            </a:r>
-          </a:p>
-        </p:txBody>
-      </p:sp>
-    </p:spTree>
-  </p:cSld>
-  <p:clrMapOvr>
-    <a:masterClrMapping/>
-  </p:clrMapOvr>
-</p:sld>
-</file>
-
-<file path=ppt/slides/slide10.xml><?xml version="1.0" encoding="utf-8"?>
-<p:sld xmlns:a="http://schemas.openxmlformats.org/drawingml/2006/main" xmlns:p="http://schemas.openxmlformats.org/presentationml/2006/main" xmlns:r="http://schemas.openxmlformats.org/officeDocument/2006/relationships">
-  <p:cSld>
-    <p:bg>
-      <p:bgPr>
-        <a:solidFill>
-          <a:srgbClr val="FFFFFF"/>
-        </a:solidFill>
-        <a:effectLst/>
-      </p:bgPr>
-    </p:bg>
-    <p:spTree>
-      <p:nvGrpSpPr>
-        <p:cNvPr id="1" name=""/>
-        <p:cNvGrpSpPr/>
-        <p:nvPr/>
-      </p:nvGrpSpPr>
-      <p:grpSpPr/>
-      <p:pic>
-        <p:nvPicPr>
-          <p:cNvPr id="2" name="Picture 1" descr="image.png"/>
-          <p:cNvPicPr>
-            <a:picLocks noChangeAspect="1"/>
-          </p:cNvPicPr>
-          <p:nvPr/>
-        </p:nvPicPr>
-        <p:blipFill>
-          <a:blip r:embed="rId2"/>
-          <a:stretch>
-            <a:fillRect/>
-          </a:stretch>
-        </p:blipFill>
-        <p:spPr>
-          <a:xfrm>
-            <a:off x="0" y="0"/>
-            <a:ext cx="12192000" cy="6858000"/>
-          </a:xfrm>
-          <a:prstGeom prst="rect">
-            <a:avLst/>
-          </a:prstGeom>
-        </p:spPr>
-      </p:pic>
-      <p:pic>
-        <p:nvPicPr>
-          <p:cNvPr id="3" name="Picture 2" descr="image.png"/>
-          <p:cNvPicPr>
-            <a:picLocks noChangeAspect="1"/>
-          </p:cNvPicPr>
-          <p:nvPr/>
-        </p:nvPicPr>
-        <p:blipFill>
-          <a:blip r:embed="rId3"/>
-          <a:stretch>
-            <a:fillRect/>
-          </a:stretch>
-        </p:blipFill>
-        <p:spPr>
-          <a:xfrm>
-            <a:off x="571500" y="1612701"/>
-            <a:ext cx="3492549" cy="4546996"/>
-          </a:xfrm>
-          <a:prstGeom prst="rect">
-            <a:avLst/>
-          </a:prstGeom>
-        </p:spPr>
-      </p:pic>
-      <p:pic>
-        <p:nvPicPr>
-          <p:cNvPr id="4" name="Picture 3" descr="image.png"/>
-          <p:cNvPicPr>
-            <a:picLocks noChangeAspect="1"/>
-          </p:cNvPicPr>
-          <p:nvPr/>
-        </p:nvPicPr>
-        <p:blipFill>
-          <a:blip r:embed="rId4"/>
-          <a:stretch>
-            <a:fillRect/>
-          </a:stretch>
-        </p:blipFill>
-        <p:spPr>
-          <a:xfrm>
-            <a:off x="4349799" y="1612701"/>
-            <a:ext cx="3492549" cy="4546996"/>
-          </a:xfrm>
-          <a:prstGeom prst="rect">
-            <a:avLst/>
-          </a:prstGeom>
-        </p:spPr>
-      </p:pic>
-      <p:pic>
-        <p:nvPicPr>
-          <p:cNvPr id="5" name="Picture 4" descr="image.png"/>
-          <p:cNvPicPr>
-            <a:picLocks noChangeAspect="1"/>
-          </p:cNvPicPr>
-          <p:nvPr/>
-        </p:nvPicPr>
-        <p:blipFill>
-          <a:blip r:embed="rId5"/>
-          <a:stretch>
-            <a:fillRect/>
-          </a:stretch>
-        </p:blipFill>
-        <p:spPr>
-          <a:xfrm>
-            <a:off x="8128099" y="1612701"/>
-            <a:ext cx="3492549" cy="4546996"/>
-          </a:xfrm>
-          <a:prstGeom prst="rect">
-            <a:avLst/>
-          </a:prstGeom>
-        </p:spPr>
-      </p:pic>
-      <p:sp>
-        <p:nvSpPr>
-          <p:cNvPr id="6" name="TextBox 5"/>
-          <p:cNvSpPr txBox="1"/>
-          <p:nvPr/>
-        </p:nvSpPr>
-        <p:spPr>
-          <a:xfrm>
-            <a:off x="866775" y="2736651"/>
-            <a:ext cx="2900362" cy="352425"/>
-          </a:xfrm>
-          <a:prstGeom prst="rect">
-            <a:avLst/>
-          </a:prstGeom>
-          <a:noFill/>
-        </p:spPr>
-        <p:txBody>
-          <a:bodyPr wrap="square" lIns="0" rIns="0" tIns="0" bIns="0" anchor="t">
-            <a:spAutoFit/>
-          </a:bodyPr>
-          <a:lstStyle/>
-          <a:p>
-            <a:pPr algn="l"/>
-            <a:r>
-              <a:rPr b="0" sz="2100" i="0" u="none">
-                <a:solidFill>
-                  <a:srgbClr val="2D3748"/>
-                </a:solidFill>
-                <a:latin typeface="Playfair Display SemiBold"/>
-              </a:rPr>
-              <a:t>1. Fokus "Micro-Habit"</a:t>
-            </a:r>
-          </a:p>
-        </p:txBody>
-      </p:sp>
-      <p:sp>
-        <p:nvSpPr>
-          <p:cNvPr id="7" name="TextBox 6"/>
-          <p:cNvSpPr txBox="1"/>
-          <p:nvPr/>
-        </p:nvSpPr>
-        <p:spPr>
-          <a:xfrm>
-            <a:off x="866775" y="3403401"/>
-            <a:ext cx="2901999" cy="2194321"/>
-          </a:xfrm>
-          <a:prstGeom prst="rect">
-            <a:avLst/>
-          </a:prstGeom>
-          <a:noFill/>
-        </p:spPr>
-        <p:txBody>
-          <a:bodyPr wrap="square" lIns="0" rIns="0" tIns="0" bIns="0" anchor="t">
-            <a:spAutoFit/>
-          </a:bodyPr>
-          <a:lstStyle/>
-          <a:p>
-            <a:pPr algn="l">
-              <a:lnSpc>
-                <a:spcPts val="2160"/>
-              </a:lnSpc>
-            </a:pPr>
-            <a:r>
-              <a:rPr b="0" sz="1350" i="0" u="none">
-                <a:solidFill>
-                  <a:srgbClr val="4A5568"/>
-                </a:solidFill>
-                <a:latin typeface="DM Sans"/>
-              </a:rPr>
-              <a:t>Karena 40% target didominasi segmen </a:t>
-            </a:r>
-            <a:r>
-              <a:rPr b="0" sz="1350" i="1" u="none">
-                <a:solidFill>
-                  <a:srgbClr val="4A5568"/>
-                </a:solidFill>
-                <a:latin typeface="DM Sans"/>
-              </a:rPr>
-              <a:t>Sedentary</a:t>
-            </a:r>
-            <a:r>
-              <a:rPr b="0" sz="1350" i="0" u="none">
-                <a:solidFill>
-                  <a:srgbClr val="4A5568"/>
-                </a:solidFill>
-                <a:latin typeface="DM Sans"/>
-              </a:rPr>
-              <a:t>, posisikan Bellabeat bukan sekadar untuk olahraga berat, melainkan pengelola kesehatan holistik. Pemasaran harus menonjolkan fitur pengingat hidrasi (botol Spring) atau jalan santai ringan.</a:t>
-            </a:r>
-          </a:p>
-        </p:txBody>
-      </p:sp>
-      <p:sp>
-        <p:nvSpPr>
-          <p:cNvPr id="8" name="TextBox 7"/>
-          <p:cNvSpPr txBox="1"/>
-          <p:nvPr/>
-        </p:nvSpPr>
-        <p:spPr>
-          <a:xfrm>
-            <a:off x="4645074" y="2736651"/>
-            <a:ext cx="2700337" cy="352425"/>
-          </a:xfrm>
-          <a:prstGeom prst="rect">
-            <a:avLst/>
-          </a:prstGeom>
-          <a:noFill/>
-        </p:spPr>
-        <p:txBody>
-          <a:bodyPr wrap="square" lIns="0" rIns="0" tIns="0" bIns="0" anchor="t">
-            <a:spAutoFit/>
-          </a:bodyPr>
-          <a:lstStyle/>
-          <a:p>
-            <a:pPr algn="l"/>
-            <a:r>
-              <a:rPr b="0" sz="2100" i="0" u="none">
-                <a:solidFill>
-                  <a:srgbClr val="2D3748"/>
-                </a:solidFill>
-                <a:latin typeface="Playfair Display SemiBold"/>
-              </a:rPr>
-              <a:t>2. Optimasi Interaksi</a:t>
-            </a:r>
-          </a:p>
-        </p:txBody>
-      </p:sp>
-      <p:sp>
-        <p:nvSpPr>
-          <p:cNvPr id="9" name="TextBox 8"/>
-          <p:cNvSpPr txBox="1"/>
-          <p:nvPr/>
-        </p:nvSpPr>
-        <p:spPr>
-          <a:xfrm>
-            <a:off x="4645074" y="3403401"/>
-            <a:ext cx="2901999" cy="1920031"/>
-          </a:xfrm>
-          <a:prstGeom prst="rect">
-            <a:avLst/>
-          </a:prstGeom>
-          <a:noFill/>
-        </p:spPr>
-        <p:txBody>
-          <a:bodyPr wrap="square" lIns="0" rIns="0" tIns="0" bIns="0" anchor="t">
-            <a:spAutoFit/>
-          </a:bodyPr>
-          <a:lstStyle/>
-          <a:p>
-            <a:pPr algn="l">
-              <a:lnSpc>
-                <a:spcPts val="2160"/>
-              </a:lnSpc>
-            </a:pPr>
-            <a:r>
-              <a:rPr b="0" sz="1350" i="0" u="none">
-                <a:solidFill>
-                  <a:srgbClr val="4A5568"/>
-                </a:solidFill>
-                <a:latin typeface="DM Sans"/>
-              </a:rPr>
-              <a:t>Alokasikan anggaran terbesar untuk iklan digital (Instagram/Google) tepat sebelum jam 12 PM dan 6 PM. Fitur </a:t>
-            </a:r>
-            <a:r>
-              <a:rPr b="0" sz="1350" i="1" u="none">
-                <a:solidFill>
-                  <a:srgbClr val="4A5568"/>
-                </a:solidFill>
-                <a:latin typeface="DM Sans"/>
-              </a:rPr>
-              <a:t>Bellabeat app</a:t>
-            </a:r>
-            <a:r>
-              <a:rPr b="0" sz="1350" i="0" u="none">
-                <a:solidFill>
-                  <a:srgbClr val="4A5568"/>
-                </a:solidFill>
-                <a:latin typeface="DM Sans"/>
-              </a:rPr>
-              <a:t> juga harus mengirimkan notifikasi </a:t>
-            </a:r>
-            <a:r>
-              <a:rPr b="0" sz="1350" i="1" u="none">
-                <a:solidFill>
-                  <a:srgbClr val="4A5568"/>
-                </a:solidFill>
-                <a:latin typeface="DM Sans"/>
-              </a:rPr>
-              <a:t>mindfulness</a:t>
-            </a:r>
-            <a:r>
-              <a:rPr b="0" sz="1350" i="0" u="none">
-                <a:solidFill>
-                  <a:srgbClr val="4A5568"/>
-                </a:solidFill>
-                <a:latin typeface="DM Sans"/>
-              </a:rPr>
-              <a:t> secara proaktif menjelang jam puncak tersebut.</a:t>
-            </a:r>
-          </a:p>
-        </p:txBody>
-      </p:sp>
-      <p:sp>
-        <p:nvSpPr>
-          <p:cNvPr id="10" name="TextBox 9"/>
-          <p:cNvSpPr txBox="1"/>
-          <p:nvPr/>
-        </p:nvSpPr>
-        <p:spPr>
-          <a:xfrm>
-            <a:off x="8423374" y="2736651"/>
-            <a:ext cx="2720340" cy="352425"/>
-          </a:xfrm>
-          <a:prstGeom prst="rect">
-            <a:avLst/>
-          </a:prstGeom>
-          <a:noFill/>
-        </p:spPr>
-        <p:txBody>
-          <a:bodyPr wrap="square" lIns="0" rIns="0" tIns="0" bIns="0" anchor="t">
-            <a:spAutoFit/>
-          </a:bodyPr>
-          <a:lstStyle/>
-          <a:p>
-            <a:pPr algn="l"/>
-            <a:r>
-              <a:rPr b="0" sz="2100" i="0" u="none">
-                <a:solidFill>
-                  <a:srgbClr val="2D3748"/>
-                </a:solidFill>
-                <a:latin typeface="Playfair Display SemiBold"/>
-              </a:rPr>
-              <a:t>3. Kenyamanan Tidur</a:t>
-            </a:r>
-          </a:p>
-        </p:txBody>
-      </p:sp>
-      <p:sp>
-        <p:nvSpPr>
-          <p:cNvPr id="11" name="TextBox 10"/>
-          <p:cNvSpPr txBox="1"/>
-          <p:nvPr/>
-        </p:nvSpPr>
-        <p:spPr>
-          <a:xfrm>
-            <a:off x="8423374" y="3403401"/>
-            <a:ext cx="2901999" cy="1920031"/>
-          </a:xfrm>
-          <a:prstGeom prst="rect">
-            <a:avLst/>
-          </a:prstGeom>
-          <a:noFill/>
-        </p:spPr>
-        <p:txBody>
-          <a:bodyPr wrap="square" lIns="0" rIns="0" tIns="0" bIns="0" anchor="t">
-            <a:spAutoFit/>
-          </a:bodyPr>
-          <a:lstStyle/>
-          <a:p>
-            <a:pPr algn="l">
-              <a:lnSpc>
-                <a:spcPts val="2160"/>
-              </a:lnSpc>
-            </a:pPr>
-            <a:r>
-              <a:rPr b="0" sz="1350" i="0" u="none">
-                <a:solidFill>
-                  <a:srgbClr val="4A5568"/>
-                </a:solidFill>
-                <a:latin typeface="DM Sans"/>
-              </a:rPr>
-              <a:t>Atasi keengganan pengguna memakai perangkat saat tidur dengan mempromosikan desain ergonomis Bellabeat Leaf. Soroti fleksibilitas Leaf yang bisa dijepitkan di kerah baju tidur untuk pelacakan malam yang nyaman tanpa beban.</a:t>
-            </a:r>
-          </a:p>
-        </p:txBody>
-      </p:sp>
-      <p:pic>
-        <p:nvPicPr>
-          <p:cNvPr id="12" name="Picture 11" descr="image.png"/>
-          <p:cNvPicPr>
-            <a:picLocks noChangeAspect="1"/>
-          </p:cNvPicPr>
-          <p:nvPr/>
-        </p:nvPicPr>
-        <p:blipFill>
-          <a:blip r:embed="rId6"/>
-          <a:stretch>
-            <a:fillRect/>
-          </a:stretch>
-        </p:blipFill>
-        <p:spPr>
-          <a:xfrm>
-            <a:off x="866775" y="2050851"/>
-            <a:ext cx="381000" cy="381000"/>
-          </a:xfrm>
-          <a:prstGeom prst="rect">
-            <a:avLst/>
-          </a:prstGeom>
-        </p:spPr>
-      </p:pic>
-      <p:pic>
-        <p:nvPicPr>
-          <p:cNvPr id="13" name="Picture 12" descr="image.png"/>
-          <p:cNvPicPr>
-            <a:picLocks noChangeAspect="1"/>
-          </p:cNvPicPr>
-          <p:nvPr/>
-        </p:nvPicPr>
-        <p:blipFill>
-          <a:blip r:embed="rId7"/>
-          <a:stretch>
-            <a:fillRect/>
-          </a:stretch>
-        </p:blipFill>
-        <p:spPr>
-          <a:xfrm>
-            <a:off x="4645074" y="2050851"/>
-            <a:ext cx="333375" cy="381000"/>
-          </a:xfrm>
-          <a:prstGeom prst="rect">
-            <a:avLst/>
-          </a:prstGeom>
-        </p:spPr>
-      </p:pic>
-      <p:pic>
-        <p:nvPicPr>
-          <p:cNvPr id="14" name="Picture 13" descr="image.png"/>
-          <p:cNvPicPr>
-            <a:picLocks noChangeAspect="1"/>
-          </p:cNvPicPr>
-          <p:nvPr/>
-        </p:nvPicPr>
-        <p:blipFill>
-          <a:blip r:embed="rId8"/>
-          <a:stretch>
-            <a:fillRect/>
-          </a:stretch>
-        </p:blipFill>
-        <p:spPr>
-          <a:xfrm>
-            <a:off x="8423374" y="2050851"/>
-            <a:ext cx="285750" cy="381000"/>
-          </a:xfrm>
-          <a:prstGeom prst="rect">
-            <a:avLst/>
-          </a:prstGeom>
-        </p:spPr>
-      </p:pic>
-      <p:sp>
-        <p:nvSpPr>
-          <p:cNvPr id="15" name="TextBox 14"/>
-          <p:cNvSpPr txBox="1"/>
-          <p:nvPr/>
-        </p:nvSpPr>
-        <p:spPr>
-          <a:xfrm>
-            <a:off x="571500" y="571500"/>
-            <a:ext cx="11601450" cy="533400"/>
-          </a:xfrm>
-          <a:prstGeom prst="rect">
-            <a:avLst/>
-          </a:prstGeom>
-          <a:noFill/>
-        </p:spPr>
-        <p:txBody>
-          <a:bodyPr wrap="square" lIns="0" rIns="0" tIns="0" bIns="0" anchor="t">
-            <a:spAutoFit/>
-          </a:bodyPr>
-          <a:lstStyle/>
-          <a:p>
-            <a:pPr algn="l"/>
-            <a:r>
-              <a:rPr b="1" sz="3150" i="0" u="none">
-                <a:solidFill>
-                  <a:srgbClr val="2D3748"/>
-                </a:solidFill>
-                <a:latin typeface="Playfair Display"/>
-              </a:rPr>
-              <a:t>3 Pilar Strategi </a:t>
-            </a:r>
-            <a:r>
-              <a:rPr b="1" sz="3150" i="0" u="none">
-                <a:solidFill>
-                  <a:srgbClr val="C87A8A"/>
-                </a:solidFill>
-                <a:latin typeface="Playfair Display"/>
-              </a:rPr>
-              <a:t>Pemasaran</a:t>
-            </a:r>
-          </a:p>
-        </p:txBody>
-      </p:sp>
-    </p:spTree>
-  </p:cSld>
-  <p:clrMapOvr>
-    <a:masterClrMapping/>
-  </p:clrMapOvr>
-</p:sld>
-</file>
-
-<file path=ppt/slides/slide11.xml><?xml version="1.0" encoding="utf-8"?>
-<p:sld xmlns:a="http://schemas.openxmlformats.org/drawingml/2006/main" xmlns:p="http://schemas.openxmlformats.org/presentationml/2006/main" xmlns:r="http://schemas.openxmlformats.org/officeDocument/2006/relationships">
-  <p:cSld>
-    <p:spTree>
-      <p:nvGrpSpPr>
-        <p:cNvPr id="1" name=""/>
-        <p:cNvGrpSpPr/>
-        <p:nvPr/>
-      </p:nvGrpSpPr>
-      <p:grpSpPr/>
-      <p:pic>
-        <p:nvPicPr>
-          <p:cNvPr id="2" name="Picture 1" descr="image.png"/>
-          <p:cNvPicPr>
-            <a:picLocks noChangeAspect="1"/>
-          </p:cNvPicPr>
-          <p:nvPr/>
-        </p:nvPicPr>
-        <p:blipFill>
-          <a:blip r:embed="rId2"/>
-          <a:stretch>
-            <a:fillRect/>
-          </a:stretch>
-        </p:blipFill>
-        <p:spPr>
-          <a:xfrm>
-            <a:off x="0" y="0"/>
-            <a:ext cx="12192000" cy="6858000"/>
-          </a:xfrm>
-          <a:prstGeom prst="rect">
-            <a:avLst/>
-          </a:prstGeom>
-        </p:spPr>
-      </p:pic>
-      <p:pic>
-        <p:nvPicPr>
-          <p:cNvPr id="3" name="Picture 2" descr="image.png"/>
-          <p:cNvPicPr>
-            <a:picLocks noChangeAspect="1"/>
-          </p:cNvPicPr>
-          <p:nvPr/>
-        </p:nvPicPr>
-        <p:blipFill>
-          <a:blip r:embed="rId3"/>
-          <a:stretch>
-            <a:fillRect/>
-          </a:stretch>
-        </p:blipFill>
-        <p:spPr>
-          <a:xfrm>
-            <a:off x="2286000" y="2136427"/>
-            <a:ext cx="7620000" cy="2584995"/>
-          </a:xfrm>
-          <a:prstGeom prst="rect">
-            <a:avLst/>
-          </a:prstGeom>
-        </p:spPr>
-      </p:pic>
-      <p:sp>
-        <p:nvSpPr>
-          <p:cNvPr id="4" name="TextBox 3"/>
-          <p:cNvSpPr txBox="1"/>
-          <p:nvPr/>
-        </p:nvSpPr>
-        <p:spPr>
-          <a:xfrm>
-            <a:off x="2895600" y="2707927"/>
-            <a:ext cx="6400800" cy="304800"/>
-          </a:xfrm>
-          <a:prstGeom prst="rect">
-            <a:avLst/>
-          </a:prstGeom>
-          <a:noFill/>
-        </p:spPr>
-        <p:txBody>
-          <a:bodyPr wrap="square" lIns="0" rIns="0" tIns="0" bIns="0" anchor="t">
-            <a:spAutoFit/>
-          </a:bodyPr>
-          <a:lstStyle/>
-          <a:p>
-            <a:pPr algn="ctr"/>
-            <a:r>
-              <a:rPr b="1" sz="1800" i="0" u="none">
-                <a:solidFill>
-                  <a:srgbClr val="2D3748"/>
-                </a:solidFill>
-                <a:latin typeface="Playfair Display"/>
-              </a:rPr>
-              <a:t>Empowering Women's Wellness</a:t>
-            </a:r>
-          </a:p>
-        </p:txBody>
-      </p:sp>
-      <p:sp>
-        <p:nvSpPr>
-          <p:cNvPr id="5" name="TextBox 4"/>
-          <p:cNvSpPr txBox="1"/>
-          <p:nvPr/>
-        </p:nvSpPr>
-        <p:spPr>
-          <a:xfrm>
-            <a:off x="3048000" y="3155602"/>
-            <a:ext cx="6096000" cy="822870"/>
-          </a:xfrm>
-          <a:prstGeom prst="rect">
-            <a:avLst/>
-          </a:prstGeom>
-          <a:noFill/>
-        </p:spPr>
-        <p:txBody>
-          <a:bodyPr wrap="square" lIns="0" rIns="0" tIns="0" bIns="0" anchor="t">
-            <a:spAutoFit/>
-          </a:bodyPr>
-          <a:lstStyle/>
-          <a:p>
-            <a:pPr algn="ctr">
-              <a:lnSpc>
-                <a:spcPts val="2160"/>
-              </a:lnSpc>
-            </a:pPr>
-            <a:r>
-              <a:rPr b="0" sz="1350" i="0" u="none">
-                <a:solidFill>
-                  <a:srgbClr val="2D3748"/>
-                </a:solidFill>
-                <a:latin typeface="DM Sans"/>
-              </a:rPr>
-              <a:t>Dengan pendekatan berbasis data, Bellabeat memiliki posisi strategis untuk mendominasi pasar </a:t>
-            </a:r>
-            <a:r>
-              <a:rPr b="0" sz="1350" i="1" u="none">
-                <a:solidFill>
-                  <a:srgbClr val="2D3748"/>
-                </a:solidFill>
-                <a:latin typeface="DM Sans"/>
-              </a:rPr>
-              <a:t>wellness technology</a:t>
-            </a:r>
-            <a:r>
-              <a:rPr b="0" sz="1350" i="0" u="none">
-                <a:solidFill>
-                  <a:srgbClr val="2D3748"/>
-                </a:solidFill>
-                <a:latin typeface="DM Sans"/>
-              </a:rPr>
-              <a:t> dengan menyediakan solusi elegan yang berpusat pada kenyamanan dan rutinitas alami wanita.</a:t>
-            </a:r>
-          </a:p>
-        </p:txBody>
-      </p:sp>
-    </p:spTree>
-  </p:cSld>
-  <p:clrMapOvr>
-    <a:masterClrMapping/>
-  </p:clrMapOvr>
-</p:sld>
-</file>
-
-<file path=ppt/slides/slide12.xml><?xml version="1.0" encoding="utf-8"?>
-<p:sld xmlns:a="http://schemas.openxmlformats.org/drawingml/2006/main" xmlns:p="http://schemas.openxmlformats.org/presentationml/2006/main" xmlns:r="http://schemas.openxmlformats.org/officeDocument/2006/relationships">
-  <p:cSld>
-    <p:bg>
-      <p:bgPr>
-        <a:solidFill>
-          <a:srgbClr val="FFFFFF"/>
-        </a:solidFill>
-        <a:effectLst/>
-      </p:bgPr>
-    </p:bg>
-    <p:spTree>
-      <p:nvGrpSpPr>
-        <p:cNvPr id="1" name=""/>
-        <p:cNvGrpSpPr/>
-        <p:nvPr/>
-      </p:nvGrpSpPr>
-      <p:grpSpPr/>
-      <p:pic>
-        <p:nvPicPr>
-          <p:cNvPr id="2" name="Picture 1" descr="image.png"/>
-          <p:cNvPicPr>
-            <a:picLocks noChangeAspect="1"/>
-          </p:cNvPicPr>
-          <p:nvPr/>
-        </p:nvPicPr>
-        <p:blipFill>
-          <a:blip r:embed="rId2"/>
-          <a:stretch>
-            <a:fillRect/>
-          </a:stretch>
-        </p:blipFill>
-        <p:spPr>
-          <a:xfrm>
-            <a:off x="0" y="0"/>
-            <a:ext cx="12192000" cy="6858000"/>
-          </a:xfrm>
-          <a:prstGeom prst="rect">
-            <a:avLst/>
-          </a:prstGeom>
-        </p:spPr>
-      </p:pic>
-      <p:sp>
-        <p:nvSpPr>
-          <p:cNvPr id="3" name="TextBox 2"/>
-          <p:cNvSpPr txBox="1"/>
-          <p:nvPr/>
-        </p:nvSpPr>
-        <p:spPr>
-          <a:xfrm>
-            <a:off x="295275" y="2298352"/>
-            <a:ext cx="11601450" cy="914400"/>
-          </a:xfrm>
-          <a:prstGeom prst="rect">
-            <a:avLst/>
-          </a:prstGeom>
-          <a:noFill/>
-        </p:spPr>
-        <p:txBody>
-          <a:bodyPr wrap="square" lIns="0" rIns="0" tIns="0" bIns="0" anchor="t">
-            <a:spAutoFit/>
-          </a:bodyPr>
-          <a:lstStyle/>
-          <a:p>
-            <a:pPr algn="ctr"/>
-            <a:r>
-              <a:rPr b="1" sz="5400" i="0" u="none">
-                <a:solidFill>
-                  <a:srgbClr val="2D3748"/>
-                </a:solidFill>
-                <a:latin typeface="Playfair Display"/>
-              </a:rPr>
-              <a:t>Terima Kasih</a:t>
-            </a:r>
-          </a:p>
-        </p:txBody>
-      </p:sp>
-      <p:sp>
-        <p:nvSpPr>
-          <p:cNvPr id="4" name="TextBox 3"/>
-          <p:cNvSpPr txBox="1"/>
-          <p:nvPr/>
-        </p:nvSpPr>
-        <p:spPr>
-          <a:xfrm>
-            <a:off x="571500" y="3441352"/>
-            <a:ext cx="11049000" cy="365670"/>
-          </a:xfrm>
-          <a:prstGeom prst="rect">
-            <a:avLst/>
-          </a:prstGeom>
-          <a:noFill/>
-        </p:spPr>
-        <p:txBody>
-          <a:bodyPr wrap="square" lIns="0" rIns="0" tIns="0" bIns="0" anchor="t">
-            <a:spAutoFit/>
-          </a:bodyPr>
-          <a:lstStyle/>
-          <a:p>
-            <a:pPr algn="ctr">
-              <a:lnSpc>
-                <a:spcPts val="2879"/>
-              </a:lnSpc>
-            </a:pPr>
-            <a:r>
-              <a:rPr b="0" sz="1800" i="0" u="none">
-                <a:solidFill>
-                  <a:srgbClr val="4A5568"/>
-                </a:solidFill>
-                <a:latin typeface="DM Sans"/>
-              </a:rPr>
-              <a:t>Sesi Diskusi &amp; Tanya Jawab</a:t>
-            </a:r>
-          </a:p>
-        </p:txBody>
-      </p:sp>
-      <p:sp>
-        <p:nvSpPr>
-          <p:cNvPr id="5" name="TextBox 4"/>
-          <p:cNvSpPr txBox="1"/>
-          <p:nvPr/>
-        </p:nvSpPr>
-        <p:spPr>
-          <a:xfrm>
-            <a:off x="571500" y="4283273"/>
-            <a:ext cx="11049000" cy="276225"/>
-          </a:xfrm>
-          <a:prstGeom prst="rect">
-            <a:avLst/>
-          </a:prstGeom>
-          <a:noFill/>
-        </p:spPr>
-        <p:txBody>
-          <a:bodyPr wrap="square" lIns="0" rIns="0" tIns="0" bIns="0" anchor="t">
-            <a:spAutoFit/>
-          </a:bodyPr>
-          <a:lstStyle/>
-          <a:p>
-            <a:pPr algn="ctr"/>
-            <a:r>
-              <a:rPr b="1" sz="1650" i="0" u="none">
-                <a:solidFill>
-                  <a:srgbClr val="C87A8A"/>
-                </a:solidFill>
-                <a:latin typeface="DM Sans"/>
-              </a:rPr>
-              <a:t>Data Analyst Portfolio Showcase</a:t>
-            </a:r>
-          </a:p>
-        </p:txBody>
-      </p:sp>
-    </p:spTree>
-  </p:cSld>
-  <p:clrMapOvr>
-    <a:masterClrMapping/>
-  </p:clrMapOvr>
-</p:sld>
-</file>
-
-<file path=ppt/slides/slide13.xml><?xml version="1.0" encoding="utf-8"?>
-<p:sld xmlns:a="http://schemas.openxmlformats.org/drawingml/2006/main" xmlns:p="http://schemas.openxmlformats.org/presentationml/2006/main" xmlns:r="http://schemas.openxmlformats.org/officeDocument/2006/relationships">
-  <p:cSld>
-    <p:bg>
-      <p:bgPr>
-        <a:solidFill>
-          <a:srgbClr val="FFFFFF"/>
-        </a:solidFill>
-        <a:effectLst/>
-      </p:bgPr>
-    </p:bg>
-    <p:spTree>
-      <p:nvGrpSpPr>
-        <p:cNvPr id="1" name=""/>
-        <p:cNvGrpSpPr/>
-        <p:nvPr/>
-      </p:nvGrpSpPr>
-      <p:grpSpPr/>
-      <p:pic>
-        <p:nvPicPr>
-          <p:cNvPr id="2" name="Picture 1" descr="image.png"/>
-          <p:cNvPicPr>
-            <a:picLocks noChangeAspect="1"/>
-          </p:cNvPicPr>
-          <p:nvPr/>
-        </p:nvPicPr>
-        <p:blipFill>
-          <a:blip r:embed="rId2"/>
-          <a:stretch>
-            <a:fillRect/>
-          </a:stretch>
-        </p:blipFill>
-        <p:spPr>
-          <a:xfrm>
-            <a:off x="0" y="0"/>
-            <a:ext cx="12192000" cy="6858000"/>
-          </a:xfrm>
-          <a:prstGeom prst="rect">
-            <a:avLst/>
-          </a:prstGeom>
-        </p:spPr>
-      </p:pic>
-      <p:sp>
-        <p:nvSpPr>
-          <p:cNvPr id="3" name="Rectangle 2"/>
-          <p:cNvSpPr/>
-          <p:nvPr/>
-        </p:nvSpPr>
-        <p:spPr>
-          <a:xfrm>
-            <a:off x="571500" y="3007072"/>
-            <a:ext cx="11049000" cy="784770"/>
-          </a:xfrm>
-          <a:prstGeom prst="rect">
-            <a:avLst/>
-          </a:prstGeom>
-          <a:noFill/>
+          <a:solidFill>
+            <a:srgbClr val="FBF4F6"/>
+          </a:solidFill>
           <a:ln>
             <a:noFill/>
           </a:ln>
-          <a:effectLst/>
         </p:spPr>
         <p:style>
           <a:lnRef idx="1">
@@ -4135,25 +3141,374 @@
       </p:sp>
       <p:sp>
         <p:nvSpPr>
-          <p:cNvPr id="4" name="Rectangle 3"/>
+          <p:cNvPr id="3" name="TextBox 2"/>
+          <p:cNvSpPr txBox="1"/>
+          <p:nvPr/>
+        </p:nvSpPr>
+        <p:spPr>
+          <a:xfrm>
+            <a:off x="822960" y="2103120"/>
+            <a:ext cx="10515600" cy="457200"/>
+          </a:xfrm>
+          <a:prstGeom prst="rect">
+            <a:avLst/>
+          </a:prstGeom>
+          <a:noFill/>
+        </p:spPr>
+        <p:txBody>
+          <a:bodyPr wrap="square">
+            <a:spAutoFit/>
+          </a:bodyPr>
+          <a:lstStyle/>
+          <a:p>
+            <a:pPr>
+              <a:spcAft>
+                <a:spcPts val="1000"/>
+              </a:spcAft>
+            </a:pPr>
+            <a:r>
+              <a:rPr sz="1300" b="1">
+                <a:solidFill>
+                  <a:srgbClr val="B85C74"/>
+                </a:solidFill>
+                <a:latin typeface="Calibri"/>
+              </a:rPr>
+              <a:t>STUDI KASUS DATA ANALYTICS</a:t>
+            </a:r>
+          </a:p>
+        </p:txBody>
+      </p:sp>
+      <p:sp>
+        <p:nvSpPr>
+          <p:cNvPr id="4" name="TextBox 3"/>
+          <p:cNvSpPr txBox="1"/>
+          <p:nvPr/>
+        </p:nvSpPr>
+        <p:spPr>
+          <a:xfrm>
+            <a:off x="822960" y="2560320"/>
+            <a:ext cx="10515600" cy="1188720"/>
+          </a:xfrm>
+          <a:prstGeom prst="rect">
+            <a:avLst/>
+          </a:prstGeom>
+          <a:noFill/>
+        </p:spPr>
+        <p:txBody>
+          <a:bodyPr wrap="square">
+            <a:spAutoFit/>
+          </a:bodyPr>
+          <a:lstStyle/>
+          <a:p>
+            <a:pPr>
+              <a:spcAft>
+                <a:spcPts val="1000"/>
+              </a:spcAft>
+            </a:pPr>
+            <a:r>
+              <a:rPr sz="3800" b="1">
+                <a:solidFill>
+                  <a:srgbClr val="1F2937"/>
+                </a:solidFill>
+                <a:latin typeface="Calibri"/>
+              </a:rPr>
+              <a:t>Analisis Penggunaan Smart Device untuk Bellabeat</a:t>
+            </a:r>
+          </a:p>
+        </p:txBody>
+      </p:sp>
+      <p:sp>
+        <p:nvSpPr>
+          <p:cNvPr id="5" name="TextBox 4"/>
+          <p:cNvSpPr txBox="1"/>
+          <p:nvPr/>
+        </p:nvSpPr>
+        <p:spPr>
+          <a:xfrm>
+            <a:off x="822960" y="3840480"/>
+            <a:ext cx="10515600" cy="548640"/>
+          </a:xfrm>
+          <a:prstGeom prst="rect">
+            <a:avLst/>
+          </a:prstGeom>
+          <a:noFill/>
+        </p:spPr>
+        <p:txBody>
+          <a:bodyPr wrap="square">
+            <a:spAutoFit/>
+          </a:bodyPr>
+          <a:lstStyle/>
+          <a:p>
+            <a:pPr>
+              <a:spcAft>
+                <a:spcPts val="1000"/>
+              </a:spcAft>
+            </a:pPr>
+            <a:r>
+              <a:rPr sz="1800" b="0">
+                <a:solidFill>
+                  <a:srgbClr val="6B7280"/>
+                </a:solidFill>
+                <a:latin typeface="Calibri"/>
+              </a:rPr>
+              <a:t>Dari data aktivitas harian Fitbit menjadi rekomendasi pemasaran</a:t>
+            </a:r>
+          </a:p>
+        </p:txBody>
+      </p:sp>
+      <p:sp>
+        <p:nvSpPr>
+          <p:cNvPr id="6" name="TextBox 5"/>
+          <p:cNvSpPr txBox="1"/>
+          <p:nvPr/>
+        </p:nvSpPr>
+        <p:spPr>
+          <a:xfrm>
+            <a:off x="822960" y="5120640"/>
+            <a:ext cx="10515600" cy="457200"/>
+          </a:xfrm>
+          <a:prstGeom prst="rect">
+            <a:avLst/>
+          </a:prstGeom>
+          <a:noFill/>
+        </p:spPr>
+        <p:txBody>
+          <a:bodyPr wrap="square">
+            <a:spAutoFit/>
+          </a:bodyPr>
+          <a:lstStyle/>
+          <a:p>
+            <a:pPr>
+              <a:spcAft>
+                <a:spcPts val="1000"/>
+              </a:spcAft>
+            </a:pPr>
+            <a:r>
+              <a:rPr sz="1300" b="0">
+                <a:solidFill>
+                  <a:srgbClr val="6B7280"/>
+                </a:solidFill>
+                <a:latin typeface="Calibri"/>
+              </a:rPr>
+              <a:t>SQL (SQLite) · Power BI · Tableau · Novaldi Ramadhan Waluyo</a:t>
+            </a:r>
+          </a:p>
+        </p:txBody>
+      </p:sp>
+    </p:spTree>
+  </p:cSld>
+  <p:clrMapOvr>
+    <a:masterClrMapping/>
+  </p:clrMapOvr>
+</p:sld>
+</file>
+
+<file path=ppt/slides/slide2.xml><?xml version="1.0" encoding="utf-8"?>
+<p:sld xmlns:a="http://schemas.openxmlformats.org/drawingml/2006/main" xmlns:p="http://schemas.openxmlformats.org/presentationml/2006/main" xmlns:r="http://schemas.openxmlformats.org/officeDocument/2006/relationships">
+  <p:cSld>
+    <p:spTree>
+      <p:nvGrpSpPr>
+        <p:cNvPr id="1" name=""/>
+        <p:cNvGrpSpPr/>
+        <p:nvPr/>
+      </p:nvGrpSpPr>
+      <p:grpSpPr/>
+      <p:sp>
+        <p:nvSpPr>
+          <p:cNvPr id="2" name="TextBox 1"/>
+          <p:cNvSpPr txBox="1"/>
+          <p:nvPr/>
+        </p:nvSpPr>
+        <p:spPr>
+          <a:xfrm>
+            <a:off x="548640" y="320040"/>
+            <a:ext cx="10972800" cy="365760"/>
+          </a:xfrm>
+          <a:prstGeom prst="rect">
+            <a:avLst/>
+          </a:prstGeom>
+          <a:noFill/>
+        </p:spPr>
+        <p:txBody>
+          <a:bodyPr wrap="square">
+            <a:spAutoFit/>
+          </a:bodyPr>
+          <a:lstStyle/>
+          <a:p>
+            <a:pPr>
+              <a:spcAft>
+                <a:spcPts val="1000"/>
+              </a:spcAft>
+            </a:pPr>
+            <a:r>
+              <a:rPr sz="1100" b="1">
+                <a:solidFill>
+                  <a:srgbClr val="B85C74"/>
+                </a:solidFill>
+                <a:latin typeface="Calibri"/>
+              </a:rPr>
+              <a:t>LATAR BELAKANG</a:t>
+            </a:r>
+          </a:p>
+        </p:txBody>
+      </p:sp>
+      <p:sp>
+        <p:nvSpPr>
+          <p:cNvPr id="3" name="TextBox 2"/>
+          <p:cNvSpPr txBox="1"/>
+          <p:nvPr/>
+        </p:nvSpPr>
+        <p:spPr>
+          <a:xfrm>
+            <a:off x="548640" y="640080"/>
+            <a:ext cx="11064240" cy="731520"/>
+          </a:xfrm>
+          <a:prstGeom prst="rect">
+            <a:avLst/>
+          </a:prstGeom>
+          <a:noFill/>
+        </p:spPr>
+        <p:txBody>
+          <a:bodyPr wrap="square">
+            <a:spAutoFit/>
+          </a:bodyPr>
+          <a:lstStyle/>
+          <a:p>
+            <a:pPr>
+              <a:spcAft>
+                <a:spcPts val="1000"/>
+              </a:spcAft>
+            </a:pPr>
+            <a:r>
+              <a:rPr sz="2800" b="1">
+                <a:solidFill>
+                  <a:srgbClr val="1F2937"/>
+                </a:solidFill>
+                <a:latin typeface="Calibri"/>
+              </a:rPr>
+              <a:t>Tujuan dan data</a:t>
+            </a:r>
+          </a:p>
+        </p:txBody>
+      </p:sp>
+      <p:sp>
+        <p:nvSpPr>
+          <p:cNvPr id="4" name="TextBox 3"/>
+          <p:cNvSpPr txBox="1"/>
+          <p:nvPr/>
+        </p:nvSpPr>
+        <p:spPr>
+          <a:xfrm>
+            <a:off x="548640" y="1645920"/>
+            <a:ext cx="5486400" cy="4572000"/>
+          </a:xfrm>
+          <a:prstGeom prst="rect">
+            <a:avLst/>
+          </a:prstGeom>
+          <a:noFill/>
+        </p:spPr>
+        <p:txBody>
+          <a:bodyPr wrap="square">
+            <a:spAutoFit/>
+          </a:bodyPr>
+          <a:lstStyle/>
+          <a:p>
+            <a:pPr>
+              <a:spcAft>
+                <a:spcPts val="1000"/>
+              </a:spcAft>
+            </a:pPr>
+            <a:r>
+              <a:rPr sz="1600" b="1">
+                <a:solidFill>
+                  <a:srgbClr val="1F2937"/>
+                </a:solidFill>
+                <a:latin typeface="Calibri"/>
+              </a:rPr>
+              <a:t>Pertanyaan bisnis. </a:t>
+            </a:r>
+            <a:r>
+              <a:rPr sz="1600" b="0">
+                <a:solidFill>
+                  <a:srgbClr val="1F2937"/>
+                </a:solidFill>
+                <a:latin typeface="Calibri"/>
+              </a:rPr>
+              <a:t>Bagaimana orang memakai fitness tracker, dan apa artinya bagi strategi pemasaran Bellabeat?</a:t>
+            </a:r>
+          </a:p>
+          <a:p>
+            <a:pPr>
+              <a:spcAft>
+                <a:spcPts val="1000"/>
+              </a:spcAft>
+            </a:pPr>
+            <a:r>
+              <a:rPr sz="1600" b="1">
+                <a:solidFill>
+                  <a:srgbClr val="1F2937"/>
+                </a:solidFill>
+                <a:latin typeface="Calibri"/>
+              </a:rPr>
+              <a:t>Sumber. </a:t>
+            </a:r>
+            <a:r>
+              <a:rPr sz="1600" b="0">
+                <a:solidFill>
+                  <a:srgbClr val="1F2937"/>
+                </a:solidFill>
+                <a:latin typeface="Calibri"/>
+              </a:rPr>
+              <a:t>FitBit Fitness Tracker Data (Möbius, Kaggle, CC0), ekspor Fitabase 12 Maret – 12 April 2016.</a:t>
+            </a:r>
+          </a:p>
+          <a:p>
+            <a:pPr>
+              <a:spcAft>
+                <a:spcPts val="1000"/>
+              </a:spcAft>
+            </a:pPr>
+            <a:r>
+              <a:rPr sz="1600" b="1">
+                <a:solidFill>
+                  <a:srgbClr val="1F2937"/>
+                </a:solidFill>
+                <a:latin typeface="Calibri"/>
+              </a:rPr>
+              <a:t>Catatan. </a:t>
+            </a:r>
+            <a:r>
+              <a:rPr sz="1600" b="0">
+                <a:solidFill>
+                  <a:srgbClr val="1F2937"/>
+                </a:solidFill>
+                <a:latin typeface="Calibri"/>
+              </a:rPr>
+              <a:t>Pengguna dalam data ini bukan pelanggan Bellabeat, sehingga temuan bersifat arah, bukan kepastian.</a:t>
+            </a:r>
+          </a:p>
+        </p:txBody>
+      </p:sp>
+      <p:sp>
+        <p:nvSpPr>
+          <p:cNvPr id="5" name="Rectangle 4"/>
           <p:cNvSpPr/>
           <p:nvPr/>
         </p:nvSpPr>
         <p:spPr>
           <a:xfrm>
-            <a:off x="571500" y="3782317"/>
-            <a:ext cx="11049000" cy="9525"/>
+            <a:off x="6492240" y="1645920"/>
+            <a:ext cx="2423160" cy="1371600"/>
           </a:xfrm>
           <a:prstGeom prst="rect">
             <a:avLst/>
           </a:prstGeom>
           <a:solidFill>
-            <a:srgbClr val="757575"/>
+            <a:srgbClr val="FBF4F6"/>
           </a:solidFill>
           <a:ln>
             <a:noFill/>
           </a:ln>
-          <a:effectLst/>
         </p:spPr>
         <p:style>
           <a:lnRef idx="1">
@@ -4179,25 +3534,102 @@
       </p:sp>
       <p:sp>
         <p:nvSpPr>
-          <p:cNvPr id="5" name="Rectangle 4"/>
+          <p:cNvPr id="6" name="TextBox 5"/>
+          <p:cNvSpPr txBox="1"/>
+          <p:nvPr/>
+        </p:nvSpPr>
+        <p:spPr>
+          <a:xfrm>
+            <a:off x="6675120" y="1783080"/>
+            <a:ext cx="2103120" cy="640080"/>
+          </a:xfrm>
+          <a:prstGeom prst="rect">
+            <a:avLst/>
+          </a:prstGeom>
+          <a:noFill/>
+        </p:spPr>
+        <p:txBody>
+          <a:bodyPr wrap="square">
+            <a:spAutoFit/>
+          </a:bodyPr>
+          <a:lstStyle/>
+          <a:p>
+            <a:pPr>
+              <a:spcAft>
+                <a:spcPts val="1000"/>
+              </a:spcAft>
+            </a:pPr>
+            <a:r>
+              <a:rPr sz="3000" b="1">
+                <a:solidFill>
+                  <a:srgbClr val="B85C74"/>
+                </a:solidFill>
+                <a:latin typeface="Calibri"/>
+              </a:rPr>
+              <a:t>35</a:t>
+            </a:r>
+          </a:p>
+        </p:txBody>
+      </p:sp>
+      <p:sp>
+        <p:nvSpPr>
+          <p:cNvPr id="7" name="TextBox 6"/>
+          <p:cNvSpPr txBox="1"/>
+          <p:nvPr/>
+        </p:nvSpPr>
+        <p:spPr>
+          <a:xfrm>
+            <a:off x="6675120" y="2468880"/>
+            <a:ext cx="2103120" cy="457200"/>
+          </a:xfrm>
+          <a:prstGeom prst="rect">
+            <a:avLst/>
+          </a:prstGeom>
+          <a:noFill/>
+        </p:spPr>
+        <p:txBody>
+          <a:bodyPr wrap="square">
+            <a:spAutoFit/>
+          </a:bodyPr>
+          <a:lstStyle/>
+          <a:p>
+            <a:pPr>
+              <a:spcAft>
+                <a:spcPts val="1000"/>
+              </a:spcAft>
+            </a:pPr>
+            <a:r>
+              <a:rPr sz="1300" b="0">
+                <a:solidFill>
+                  <a:srgbClr val="6B7280"/>
+                </a:solidFill>
+                <a:latin typeface="Calibri"/>
+              </a:rPr>
+              <a:t>pengguna</a:t>
+            </a:r>
+          </a:p>
+        </p:txBody>
+      </p:sp>
+      <p:sp>
+        <p:nvSpPr>
+          <p:cNvPr id="8" name="Rectangle 7"/>
           <p:cNvSpPr/>
           <p:nvPr/>
         </p:nvSpPr>
         <p:spPr>
           <a:xfrm>
-            <a:off x="571500" y="3782317"/>
-            <a:ext cx="11049000" cy="9525"/>
+            <a:off x="9144000" y="1645920"/>
+            <a:ext cx="2423160" cy="1371600"/>
           </a:xfrm>
           <a:prstGeom prst="rect">
             <a:avLst/>
           </a:prstGeom>
           <a:solidFill>
-            <a:srgbClr val="757575"/>
+            <a:srgbClr val="FBF4F6"/>
           </a:solidFill>
           <a:ln>
             <a:noFill/>
           </a:ln>
-          <a:effectLst/>
         </p:spPr>
         <p:style>
           <a:lnRef idx="1">
@@ -4221,40 +3653,16 @@
           </a:p>
         </p:txBody>
       </p:sp>
-      <p:pic>
-        <p:nvPicPr>
-          <p:cNvPr id="6" name="Picture 5" descr="image.png"/>
-          <p:cNvPicPr>
-            <a:picLocks noChangeAspect="1"/>
-          </p:cNvPicPr>
-          <p:nvPr/>
-        </p:nvPicPr>
-        <p:blipFill>
-          <a:blip r:embed="rId3"/>
-          <a:stretch>
-            <a:fillRect/>
-          </a:stretch>
-        </p:blipFill>
-        <p:spPr>
-          <a:xfrm>
-            <a:off x="571500" y="3156495"/>
-            <a:ext cx="857250" cy="476250"/>
-          </a:xfrm>
-          <a:prstGeom prst="rect">
-            <a:avLst/>
-          </a:prstGeom>
-        </p:spPr>
-      </p:pic>
-      <p:sp>
-        <p:nvSpPr>
-          <p:cNvPr id="7" name="TextBox 6"/>
+      <p:sp>
+        <p:nvSpPr>
+          <p:cNvPr id="9" name="TextBox 8"/>
           <p:cNvSpPr txBox="1"/>
           <p:nvPr/>
         </p:nvSpPr>
         <p:spPr>
           <a:xfrm>
-            <a:off x="1666875" y="3149947"/>
-            <a:ext cx="9953625" cy="198090"/>
+            <a:off x="9326880" y="1783080"/>
+            <a:ext cx="2103120" cy="640080"/>
           </a:xfrm>
           <a:prstGeom prst="rect">
             <a:avLst/>
@@ -4262,38 +3670,38 @@
           <a:noFill/>
         </p:spPr>
         <p:txBody>
-          <a:bodyPr wrap="square" lIns="0" rIns="0" tIns="0" bIns="0" anchor="t">
+          <a:bodyPr wrap="square">
             <a:spAutoFit/>
           </a:bodyPr>
           <a:lstStyle/>
           <a:p>
-            <a:pPr algn="l">
-              <a:lnSpc>
-                <a:spcPts val="1560"/>
-              </a:lnSpc>
+            <a:pPr>
+              <a:spcAft>
+                <a:spcPts val="1000"/>
+              </a:spcAft>
             </a:pPr>
             <a:r>
-              <a:rPr b="0" sz="975" i="0" u="none">
-                <a:solidFill>
-                  <a:srgbClr val="4A5568"/>
-                </a:solidFill>
-                <a:latin typeface="DM Sans"/>
-              </a:rPr>
-              <a:t>https://d39l2hkdp2esp1.cloudfront.net/img/photo/274853/274853_00_2x.jpg?20230514120641</a:t>
-            </a:r>
-          </a:p>
-        </p:txBody>
-      </p:sp>
-      <p:sp>
-        <p:nvSpPr>
-          <p:cNvPr id="8" name="TextBox 7"/>
+              <a:rPr sz="3000" b="1">
+                <a:solidFill>
+                  <a:srgbClr val="B85C74"/>
+                </a:solidFill>
+                <a:latin typeface="Calibri"/>
+              </a:rPr>
+              <a:t>457</a:t>
+            </a:r>
+          </a:p>
+        </p:txBody>
+      </p:sp>
+      <p:sp>
+        <p:nvSpPr>
+          <p:cNvPr id="10" name="TextBox 9"/>
           <p:cNvSpPr txBox="1"/>
           <p:nvPr/>
         </p:nvSpPr>
         <p:spPr>
           <a:xfrm>
-            <a:off x="1666875" y="3395662"/>
-            <a:ext cx="9953625" cy="243780"/>
+            <a:off x="9326880" y="2468880"/>
+            <a:ext cx="2103120" cy="457200"/>
           </a:xfrm>
           <a:prstGeom prst="rect">
             <a:avLst/>
@@ -4301,289 +3709,48 @@
           <a:noFill/>
         </p:spPr>
         <p:txBody>
-          <a:bodyPr wrap="square" lIns="0" rIns="0" tIns="0" bIns="0" anchor="t">
+          <a:bodyPr wrap="square">
             <a:spAutoFit/>
           </a:bodyPr>
           <a:lstStyle/>
           <a:p>
-            <a:pPr algn="l">
-              <a:lnSpc>
-                <a:spcPts val="1920"/>
-              </a:lnSpc>
+            <a:pPr>
+              <a:spcAft>
+                <a:spcPts val="1000"/>
+              </a:spcAft>
             </a:pPr>
             <a:r>
-              <a:rPr b="0" sz="1200" i="0" u="none">
-                <a:solidFill>
-                  <a:srgbClr val="4A5568"/>
-                </a:solidFill>
-                <a:latin typeface="DM Sans"/>
-              </a:rPr>
-              <a:t>Source: </a:t>
-            </a:r>
-            <a:r>
-              <a:rPr b="0" sz="1200" i="0" u="none">
-                <a:solidFill>
-                  <a:srgbClr val="4F46E5"/>
-                </a:solidFill>
-                <a:latin typeface="DM Sans"/>
-              </a:rPr>
-              <a:t>www.youworkforthem.com</a:t>
-            </a:r>
-          </a:p>
-        </p:txBody>
-      </p:sp>
-      <p:pic>
-        <p:nvPicPr>
-          <p:cNvPr id="9" name="Picture 8" descr="image.png"/>
-          <p:cNvPicPr>
-            <a:picLocks noChangeAspect="1"/>
-          </p:cNvPicPr>
-          <p:nvPr/>
-        </p:nvPicPr>
-        <p:blipFill>
-          <a:blip r:embed="rId4"/>
-          <a:stretch>
-            <a:fillRect/>
-          </a:stretch>
-        </p:blipFill>
-        <p:spPr>
-          <a:xfrm>
-            <a:off x="571500" y="4040385"/>
-            <a:ext cx="857250" cy="476250"/>
-          </a:xfrm>
-          <a:prstGeom prst="rect">
-            <a:avLst/>
-          </a:prstGeom>
-        </p:spPr>
-      </p:pic>
-      <p:sp>
-        <p:nvSpPr>
-          <p:cNvPr id="10" name="TextBox 9"/>
-          <p:cNvSpPr txBox="1"/>
-          <p:nvPr/>
-        </p:nvSpPr>
-        <p:spPr>
-          <a:xfrm>
-            <a:off x="1666875" y="3934717"/>
-            <a:ext cx="9953625" cy="396180"/>
-          </a:xfrm>
-          <a:prstGeom prst="rect">
-            <a:avLst/>
-          </a:prstGeom>
-          <a:noFill/>
-        </p:spPr>
-        <p:txBody>
-          <a:bodyPr wrap="square" lIns="0" rIns="0" tIns="0" bIns="0" anchor="t">
-            <a:spAutoFit/>
-          </a:bodyPr>
-          <a:lstStyle/>
-          <a:p>
-            <a:pPr algn="l">
-              <a:lnSpc>
-                <a:spcPts val="1560"/>
-              </a:lnSpc>
-            </a:pPr>
-            <a:r>
-              <a:rPr b="0" sz="975" i="0" u="none">
-                <a:solidFill>
-                  <a:srgbClr val="4A5568"/>
-                </a:solidFill>
-                <a:latin typeface="DM Sans"/>
-              </a:rPr>
-              <a:t>https://elements-resized.envatousercontent.com/elements-video-cover-images/1e029c10-9a5e-45ed-9262-9018b3bd48e1/video_preview/video_preview_0000.jpg?w=500&amp;cf_fit=cover&amp;q=85&amp;format=auto&amp;s=6879fbbf38c2ab4fefbb62f087dd673adff78dcc0f034a213bc3356d5d598fbe</a:t>
-            </a:r>
-          </a:p>
-        </p:txBody>
-      </p:sp>
-      <p:sp>
-        <p:nvSpPr>
-          <p:cNvPr id="11" name="TextBox 10"/>
-          <p:cNvSpPr txBox="1"/>
-          <p:nvPr/>
-        </p:nvSpPr>
-        <p:spPr>
-          <a:xfrm>
-            <a:off x="1666875" y="4378523"/>
-            <a:ext cx="9953625" cy="243780"/>
-          </a:xfrm>
-          <a:prstGeom prst="rect">
-            <a:avLst/>
-          </a:prstGeom>
-          <a:noFill/>
-        </p:spPr>
-        <p:txBody>
-          <a:bodyPr wrap="square" lIns="0" rIns="0" tIns="0" bIns="0" anchor="t">
-            <a:spAutoFit/>
-          </a:bodyPr>
-          <a:lstStyle/>
-          <a:p>
-            <a:pPr algn="l">
-              <a:lnSpc>
-                <a:spcPts val="1920"/>
-              </a:lnSpc>
-            </a:pPr>
-            <a:r>
-              <a:rPr b="0" sz="1200" i="0" u="none">
-                <a:solidFill>
-                  <a:srgbClr val="4A5568"/>
-                </a:solidFill>
-                <a:latin typeface="DM Sans"/>
-              </a:rPr>
-              <a:t>Source: </a:t>
-            </a:r>
-            <a:r>
-              <a:rPr b="0" sz="1200" i="0" u="none">
-                <a:solidFill>
-                  <a:srgbClr val="4F46E5"/>
-                </a:solidFill>
-                <a:latin typeface="DM Sans"/>
-              </a:rPr>
-              <a:t>elements.envato.com</a:t>
-            </a:r>
-          </a:p>
-        </p:txBody>
-      </p:sp>
-      <p:sp>
-        <p:nvSpPr>
-          <p:cNvPr id="12" name="TextBox 11"/>
-          <p:cNvSpPr txBox="1"/>
-          <p:nvPr/>
-        </p:nvSpPr>
-        <p:spPr>
-          <a:xfrm>
-            <a:off x="571500" y="571500"/>
-            <a:ext cx="11601450" cy="533400"/>
-          </a:xfrm>
-          <a:prstGeom prst="rect">
-            <a:avLst/>
-          </a:prstGeom>
-          <a:noFill/>
-        </p:spPr>
-        <p:txBody>
-          <a:bodyPr wrap="square" lIns="0" rIns="0" tIns="0" bIns="0" anchor="t">
-            <a:spAutoFit/>
-          </a:bodyPr>
-          <a:lstStyle/>
-          <a:p>
-            <a:pPr algn="l"/>
-            <a:r>
-              <a:rPr b="1" sz="3150" i="0" u="none">
-                <a:solidFill>
-                  <a:srgbClr val="2D3748"/>
-                </a:solidFill>
-                <a:latin typeface="Playfair Display"/>
-              </a:rPr>
-              <a:t>Image Sources</a:t>
-            </a:r>
-          </a:p>
-        </p:txBody>
-      </p:sp>
-    </p:spTree>
-  </p:cSld>
-  <p:clrMapOvr>
-    <a:masterClrMapping/>
-  </p:clrMapOvr>
-</p:sld>
-</file>
-
-<file path=ppt/slides/slide2.xml><?xml version="1.0" encoding="utf-8"?>
-<p:sld xmlns:a="http://schemas.openxmlformats.org/drawingml/2006/main" xmlns:p="http://schemas.openxmlformats.org/presentationml/2006/main" xmlns:r="http://schemas.openxmlformats.org/officeDocument/2006/relationships">
-  <p:cSld>
-    <p:bg>
-      <p:bgPr>
-        <a:solidFill>
-          <a:srgbClr val="FFFFFF"/>
-        </a:solidFill>
-        <a:effectLst/>
-      </p:bgPr>
-    </p:bg>
-    <p:spTree>
-      <p:nvGrpSpPr>
-        <p:cNvPr id="1" name=""/>
-        <p:cNvGrpSpPr/>
-        <p:nvPr/>
-      </p:nvGrpSpPr>
-      <p:grpSpPr/>
-      <p:pic>
-        <p:nvPicPr>
-          <p:cNvPr id="2" name="Picture 1" descr="image.png"/>
-          <p:cNvPicPr>
-            <a:picLocks noChangeAspect="1"/>
-          </p:cNvPicPr>
-          <p:nvPr/>
-        </p:nvPicPr>
-        <p:blipFill>
-          <a:blip r:embed="rId2"/>
-          <a:stretch>
-            <a:fillRect/>
-          </a:stretch>
-        </p:blipFill>
-        <p:spPr>
-          <a:xfrm>
-            <a:off x="0" y="0"/>
-            <a:ext cx="12192000" cy="6858000"/>
-          </a:xfrm>
-          <a:prstGeom prst="rect">
-            <a:avLst/>
-          </a:prstGeom>
-        </p:spPr>
-      </p:pic>
-      <p:sp>
-        <p:nvSpPr>
-          <p:cNvPr id="3" name="TextBox 2"/>
-          <p:cNvSpPr txBox="1"/>
-          <p:nvPr/>
-        </p:nvSpPr>
-        <p:spPr>
-          <a:xfrm>
-            <a:off x="2865596" y="2123182"/>
-            <a:ext cx="6460807" cy="714375"/>
-          </a:xfrm>
-          <a:prstGeom prst="rect">
-            <a:avLst/>
-          </a:prstGeom>
-          <a:noFill/>
-        </p:spPr>
-        <p:txBody>
-          <a:bodyPr wrap="square" lIns="0" rIns="0" tIns="0" bIns="0" anchor="t">
-            <a:spAutoFit/>
-          </a:bodyPr>
-          <a:lstStyle/>
-          <a:p>
-            <a:pPr algn="ctr"/>
-            <a:r>
-              <a:rPr b="1" sz="4200" i="0" u="none">
-                <a:solidFill>
-                  <a:srgbClr val="2D3748"/>
-                </a:solidFill>
-                <a:latin typeface="Playfair Display"/>
-              </a:rPr>
-              <a:t>Latar Belakang &amp; Tujuan</a:t>
-            </a:r>
-          </a:p>
-        </p:txBody>
-      </p:sp>
-      <p:sp>
-        <p:nvSpPr>
-          <p:cNvPr id="4" name="Rectangle 3"/>
+              <a:rPr sz="1300" b="0">
+                <a:solidFill>
+                  <a:srgbClr val="6B7280"/>
+                </a:solidFill>
+                <a:latin typeface="Calibri"/>
+              </a:rPr>
+              <a:t>hari-pengguna tercatat</a:t>
+            </a:r>
+          </a:p>
+        </p:txBody>
+      </p:sp>
+      <p:sp>
+        <p:nvSpPr>
+          <p:cNvPr id="11" name="Rectangle 10"/>
           <p:cNvSpPr/>
           <p:nvPr/>
         </p:nvSpPr>
         <p:spPr>
           <a:xfrm>
-            <a:off x="5715000" y="3313807"/>
-            <a:ext cx="762000" cy="38100"/>
+            <a:off x="6492240" y="3246120"/>
+            <a:ext cx="2423160" cy="1371600"/>
           </a:xfrm>
           <a:prstGeom prst="rect">
             <a:avLst/>
           </a:prstGeom>
           <a:solidFill>
-            <a:srgbClr val="C87A8A"/>
+            <a:srgbClr val="FBF4F6"/>
           </a:solidFill>
           <a:ln>
             <a:noFill/>
           </a:ln>
-          <a:effectLst/>
         </p:spPr>
         <p:style>
           <a:lnRef idx="1">
@@ -4609,14 +3776,14 @@
       </p:sp>
       <p:sp>
         <p:nvSpPr>
-          <p:cNvPr id="5" name="TextBox 4"/>
+          <p:cNvPr id="12" name="TextBox 11"/>
           <p:cNvSpPr txBox="1"/>
           <p:nvPr/>
         </p:nvSpPr>
         <p:spPr>
           <a:xfrm>
-            <a:off x="2286000" y="3637657"/>
-            <a:ext cx="7620000" cy="1097012"/>
+            <a:off x="6675120" y="3383279"/>
+            <a:ext cx="2103120" cy="640080"/>
           </a:xfrm>
           <a:prstGeom prst="rect">
             <a:avLst/>
@@ -4624,112 +3791,38 @@
           <a:noFill/>
         </p:spPr>
         <p:txBody>
-          <a:bodyPr wrap="square" lIns="0" rIns="0" tIns="0" bIns="0" anchor="t">
+          <a:bodyPr wrap="square">
             <a:spAutoFit/>
           </a:bodyPr>
           <a:lstStyle/>
           <a:p>
-            <a:pPr algn="ctr">
-              <a:lnSpc>
-                <a:spcPts val="2879"/>
-              </a:lnSpc>
+            <a:pPr>
+              <a:spcAft>
+                <a:spcPts val="1000"/>
+              </a:spcAft>
             </a:pPr>
             <a:r>
-              <a:rPr b="0" sz="1800" i="0" u="none">
-                <a:solidFill>
-                  <a:srgbClr val="718096"/>
-                </a:solidFill>
-                <a:latin typeface="DM Sans"/>
-              </a:rPr>
-              <a:t>Membedah data aktivitas harian pengguna non-Bellabeat untuk memahami perilaku konsumen dan merancang kampanye pemasaran yang tepat sasaran.</a:t>
-            </a:r>
-          </a:p>
-        </p:txBody>
-      </p:sp>
-    </p:spTree>
-  </p:cSld>
-  <p:clrMapOvr>
-    <a:masterClrMapping/>
-  </p:clrMapOvr>
-</p:sld>
-</file>
-
-<file path=ppt/slides/slide3.xml><?xml version="1.0" encoding="utf-8"?>
-<p:sld xmlns:a="http://schemas.openxmlformats.org/drawingml/2006/main" xmlns:p="http://schemas.openxmlformats.org/presentationml/2006/main" xmlns:r="http://schemas.openxmlformats.org/officeDocument/2006/relationships">
-  <p:cSld>
-    <p:bg>
-      <p:bgPr>
-        <a:solidFill>
-          <a:srgbClr val="FFFFFF"/>
-        </a:solidFill>
-        <a:effectLst/>
-      </p:bgPr>
-    </p:bg>
-    <p:spTree>
-      <p:nvGrpSpPr>
-        <p:cNvPr id="1" name=""/>
-        <p:cNvGrpSpPr/>
-        <p:nvPr/>
-      </p:nvGrpSpPr>
-      <p:grpSpPr/>
-      <p:pic>
-        <p:nvPicPr>
-          <p:cNvPr id="2" name="Picture 1" descr="image.png"/>
-          <p:cNvPicPr>
-            <a:picLocks noChangeAspect="1"/>
-          </p:cNvPicPr>
-          <p:nvPr/>
-        </p:nvPicPr>
-        <p:blipFill>
-          <a:blip r:embed="rId2"/>
-          <a:stretch>
-            <a:fillRect/>
-          </a:stretch>
-        </p:blipFill>
-        <p:spPr>
-          <a:xfrm>
-            <a:off x="0" y="0"/>
-            <a:ext cx="12192000" cy="6858000"/>
-          </a:xfrm>
-          <a:prstGeom prst="rect">
-            <a:avLst/>
-          </a:prstGeom>
-        </p:spPr>
-      </p:pic>
-      <p:pic>
-        <p:nvPicPr>
-          <p:cNvPr id="3" name="Picture 2" descr="image.png"/>
-          <p:cNvPicPr>
-            <a:picLocks noChangeAspect="1"/>
-          </p:cNvPicPr>
-          <p:nvPr/>
-        </p:nvPicPr>
-        <p:blipFill>
-          <a:blip r:embed="rId3"/>
-          <a:stretch>
-            <a:fillRect/>
-          </a:stretch>
-        </p:blipFill>
-        <p:spPr>
-          <a:xfrm>
-            <a:off x="6381750" y="1981051"/>
-            <a:ext cx="5238750" cy="3810000"/>
-          </a:xfrm>
-          <a:prstGeom prst="rect">
-            <a:avLst/>
-          </a:prstGeom>
-        </p:spPr>
-      </p:pic>
-      <p:sp>
-        <p:nvSpPr>
-          <p:cNvPr id="4" name="TextBox 3"/>
+              <a:rPr sz="3000" b="1">
+                <a:solidFill>
+                  <a:srgbClr val="B85C74"/>
+                </a:solidFill>
+                <a:latin typeface="Calibri"/>
+              </a:rPr>
+              <a:t>13</a:t>
+            </a:r>
+          </a:p>
+        </p:txBody>
+      </p:sp>
+      <p:sp>
+        <p:nvSpPr>
+          <p:cNvPr id="13" name="TextBox 12"/>
           <p:cNvSpPr txBox="1"/>
           <p:nvPr/>
         </p:nvSpPr>
         <p:spPr>
           <a:xfrm>
-            <a:off x="571500" y="2159347"/>
-            <a:ext cx="5238750" cy="914400"/>
+            <a:off x="6675120" y="4069080"/>
+            <a:ext cx="2103120" cy="457200"/>
           </a:xfrm>
           <a:prstGeom prst="rect">
             <a:avLst/>
@@ -4737,789 +3830,48 @@
           <a:noFill/>
         </p:spPr>
         <p:txBody>
-          <a:bodyPr wrap="square" lIns="0" rIns="0" tIns="0" bIns="0" anchor="t">
+          <a:bodyPr wrap="square">
             <a:spAutoFit/>
           </a:bodyPr>
           <a:lstStyle/>
           <a:p>
-            <a:pPr algn="l">
-              <a:lnSpc>
-                <a:spcPts val="2400"/>
-              </a:lnSpc>
+            <a:pPr>
+              <a:spcAft>
+                <a:spcPts val="1000"/>
+              </a:spcAft>
             </a:pPr>
             <a:r>
-              <a:rPr b="0" sz="1500" i="0" u="none">
-                <a:solidFill>
-                  <a:srgbClr val="4A5568"/>
-                </a:solidFill>
-                <a:latin typeface="DM Sans"/>
-              </a:rPr>
-              <a:t>Bellabeat adalah pelopor produk teknologi kesehatan bagi wanita. Untuk mendominasi pasar global, kita perlu memahami pola kebiasaan audiens kita.</a:t>
-            </a:r>
-          </a:p>
-        </p:txBody>
-      </p:sp>
-      <p:sp>
-        <p:nvSpPr>
-          <p:cNvPr id="5" name="TextBox 4"/>
-          <p:cNvSpPr txBox="1"/>
-          <p:nvPr/>
-        </p:nvSpPr>
-        <p:spPr>
-          <a:xfrm>
-            <a:off x="857250" y="3311872"/>
-            <a:ext cx="4953000" cy="548580"/>
-          </a:xfrm>
-          <a:prstGeom prst="rect">
-            <a:avLst/>
-          </a:prstGeom>
-          <a:noFill/>
-        </p:spPr>
-        <p:txBody>
-          <a:bodyPr wrap="square" lIns="0" rIns="0" tIns="0" bIns="0" anchor="t">
-            <a:spAutoFit/>
-          </a:bodyPr>
-          <a:lstStyle/>
-          <a:p>
-            <a:pPr algn="l">
-              <a:lnSpc>
-                <a:spcPts val="2160"/>
-              </a:lnSpc>
-            </a:pPr>
-            <a:r>
-              <a:rPr b="1" sz="1350" i="0" u="none">
-                <a:solidFill>
-                  <a:srgbClr val="4A5568"/>
-                </a:solidFill>
-                <a:latin typeface="DM Sans"/>
-              </a:rPr>
-              <a:t>Analisis Dataset Publik:</a:t>
-            </a:r>
-            <a:r>
-              <a:rPr b="0" sz="1350" i="0" u="none">
-                <a:solidFill>
-                  <a:srgbClr val="4A5568"/>
-                </a:solidFill>
-                <a:latin typeface="DM Sans"/>
-              </a:rPr>
-              <a:t> Mengolah data Fitbit dari 35 pengguna aktif selama satu bulan penuh.</a:t>
-            </a:r>
-          </a:p>
-        </p:txBody>
-      </p:sp>
-      <p:sp>
-        <p:nvSpPr>
-          <p:cNvPr id="6" name="TextBox 5"/>
-          <p:cNvSpPr txBox="1"/>
-          <p:nvPr/>
-        </p:nvSpPr>
-        <p:spPr>
-          <a:xfrm>
-            <a:off x="857250" y="4050952"/>
-            <a:ext cx="4953000" cy="548580"/>
-          </a:xfrm>
-          <a:prstGeom prst="rect">
-            <a:avLst/>
-          </a:prstGeom>
-          <a:noFill/>
-        </p:spPr>
-        <p:txBody>
-          <a:bodyPr wrap="square" lIns="0" rIns="0" tIns="0" bIns="0" anchor="t">
-            <a:spAutoFit/>
-          </a:bodyPr>
-          <a:lstStyle/>
-          <a:p>
-            <a:pPr algn="l">
-              <a:lnSpc>
-                <a:spcPts val="2160"/>
-              </a:lnSpc>
-            </a:pPr>
-            <a:r>
-              <a:rPr b="1" sz="1350" i="0" u="none">
-                <a:solidFill>
-                  <a:srgbClr val="4A5568"/>
-                </a:solidFill>
-                <a:latin typeface="DM Sans"/>
-              </a:rPr>
-              <a:t>Eksplorasi Perilaku:</a:t>
-            </a:r>
-            <a:r>
-              <a:rPr b="0" sz="1350" i="0" u="none">
-                <a:solidFill>
-                  <a:srgbClr val="4A5568"/>
-                </a:solidFill>
-                <a:latin typeface="DM Sans"/>
-              </a:rPr>
-              <a:t> Mengidentifikasi kapan pengguna paling aktif bergerak dan kapan mereka beristirahat.</a:t>
-            </a:r>
-          </a:p>
-        </p:txBody>
-      </p:sp>
-      <p:sp>
-        <p:nvSpPr>
-          <p:cNvPr id="7" name="TextBox 6"/>
-          <p:cNvSpPr txBox="1"/>
-          <p:nvPr/>
-        </p:nvSpPr>
-        <p:spPr>
-          <a:xfrm>
-            <a:off x="857250" y="4790033"/>
-            <a:ext cx="4953000" cy="822870"/>
-          </a:xfrm>
-          <a:prstGeom prst="rect">
-            <a:avLst/>
-          </a:prstGeom>
-          <a:noFill/>
-        </p:spPr>
-        <p:txBody>
-          <a:bodyPr wrap="square" lIns="0" rIns="0" tIns="0" bIns="0" anchor="t">
-            <a:spAutoFit/>
-          </a:bodyPr>
-          <a:lstStyle/>
-          <a:p>
-            <a:pPr algn="l">
-              <a:lnSpc>
-                <a:spcPts val="2160"/>
-              </a:lnSpc>
-            </a:pPr>
-            <a:r>
-              <a:rPr b="1" sz="1350" i="0" u="none">
-                <a:solidFill>
-                  <a:srgbClr val="4A5568"/>
-                </a:solidFill>
-                <a:latin typeface="DM Sans"/>
-              </a:rPr>
-              <a:t>Peluang Bisnis:</a:t>
-            </a:r>
-            <a:r>
-              <a:rPr b="0" sz="1350" i="0" u="none">
-                <a:solidFill>
-                  <a:srgbClr val="4A5568"/>
-                </a:solidFill>
-                <a:latin typeface="DM Sans"/>
-              </a:rPr>
-              <a:t> Menemukan celah di mana produk Bellabeat (Leaf, Time, Spring) dapat memecahkan masalah rutinitas harian mereka.</a:t>
-            </a:r>
-          </a:p>
-        </p:txBody>
-      </p:sp>
-      <p:pic>
-        <p:nvPicPr>
-          <p:cNvPr id="8" name="Picture 7" descr="image.png"/>
-          <p:cNvPicPr>
-            <a:picLocks noChangeAspect="1"/>
-          </p:cNvPicPr>
-          <p:nvPr/>
-        </p:nvPicPr>
-        <p:blipFill>
-          <a:blip r:embed="rId4"/>
-          <a:stretch>
-            <a:fillRect/>
-          </a:stretch>
-        </p:blipFill>
-        <p:spPr>
-          <a:xfrm>
-            <a:off x="6381750" y="1981051"/>
-            <a:ext cx="5238750" cy="3810000"/>
-          </a:xfrm>
-          <a:prstGeom prst="rect">
-            <a:avLst/>
-          </a:prstGeom>
-        </p:spPr>
-      </p:pic>
-      <p:sp>
-        <p:nvSpPr>
-          <p:cNvPr id="9" name="TextBox 8"/>
-          <p:cNvSpPr txBox="1"/>
-          <p:nvPr/>
-        </p:nvSpPr>
-        <p:spPr>
-          <a:xfrm>
-            <a:off x="571500" y="3330922"/>
-            <a:ext cx="133350" cy="276225"/>
-          </a:xfrm>
-          <a:prstGeom prst="rect">
-            <a:avLst/>
-          </a:prstGeom>
-          <a:noFill/>
-        </p:spPr>
-        <p:txBody>
-          <a:bodyPr wrap="square" lIns="0" rIns="0" tIns="0" bIns="0" anchor="t">
-            <a:spAutoFit/>
-          </a:bodyPr>
-          <a:lstStyle/>
-          <a:p>
-            <a:pPr algn="l">
-              <a:lnSpc>
-                <a:spcPts val="2160"/>
-              </a:lnSpc>
-            </a:pPr>
-            <a:r>
-              <a:rPr b="0" sz="1350" i="0" u="none">
-                <a:solidFill>
-                  <a:srgbClr val="C87A8A"/>
-                </a:solidFill>
-                <a:latin typeface="DM Sans"/>
-              </a:rPr>
-              <a:t>✦</a:t>
-            </a:r>
-          </a:p>
-        </p:txBody>
-      </p:sp>
-      <p:sp>
-        <p:nvSpPr>
-          <p:cNvPr id="10" name="TextBox 9"/>
-          <p:cNvSpPr txBox="1"/>
-          <p:nvPr/>
-        </p:nvSpPr>
-        <p:spPr>
-          <a:xfrm>
-            <a:off x="571500" y="4070002"/>
-            <a:ext cx="133350" cy="276225"/>
-          </a:xfrm>
-          <a:prstGeom prst="rect">
-            <a:avLst/>
-          </a:prstGeom>
-          <a:noFill/>
-        </p:spPr>
-        <p:txBody>
-          <a:bodyPr wrap="square" lIns="0" rIns="0" tIns="0" bIns="0" anchor="t">
-            <a:spAutoFit/>
-          </a:bodyPr>
-          <a:lstStyle/>
-          <a:p>
-            <a:pPr algn="l">
-              <a:lnSpc>
-                <a:spcPts val="2160"/>
-              </a:lnSpc>
-            </a:pPr>
-            <a:r>
-              <a:rPr b="0" sz="1350" i="0" u="none">
-                <a:solidFill>
-                  <a:srgbClr val="C87A8A"/>
-                </a:solidFill>
-                <a:latin typeface="DM Sans"/>
-              </a:rPr>
-              <a:t>✦</a:t>
-            </a:r>
-          </a:p>
-        </p:txBody>
-      </p:sp>
-      <p:sp>
-        <p:nvSpPr>
-          <p:cNvPr id="11" name="TextBox 10"/>
-          <p:cNvSpPr txBox="1"/>
-          <p:nvPr/>
-        </p:nvSpPr>
-        <p:spPr>
-          <a:xfrm>
-            <a:off x="571500" y="4809083"/>
-            <a:ext cx="133350" cy="276225"/>
-          </a:xfrm>
-          <a:prstGeom prst="rect">
-            <a:avLst/>
-          </a:prstGeom>
-          <a:noFill/>
-        </p:spPr>
-        <p:txBody>
-          <a:bodyPr wrap="square" lIns="0" rIns="0" tIns="0" bIns="0" anchor="t">
-            <a:spAutoFit/>
-          </a:bodyPr>
-          <a:lstStyle/>
-          <a:p>
-            <a:pPr algn="l">
-              <a:lnSpc>
-                <a:spcPts val="2160"/>
-              </a:lnSpc>
-            </a:pPr>
-            <a:r>
-              <a:rPr b="0" sz="1350" i="0" u="none">
-                <a:solidFill>
-                  <a:srgbClr val="C87A8A"/>
-                </a:solidFill>
-                <a:latin typeface="DM Sans"/>
-              </a:rPr>
-              <a:t>✦</a:t>
-            </a:r>
-          </a:p>
-        </p:txBody>
-      </p:sp>
-      <p:sp>
-        <p:nvSpPr>
-          <p:cNvPr id="12" name="TextBox 11"/>
-          <p:cNvSpPr txBox="1"/>
-          <p:nvPr/>
-        </p:nvSpPr>
-        <p:spPr>
-          <a:xfrm>
-            <a:off x="571500" y="571500"/>
-            <a:ext cx="11601450" cy="533400"/>
-          </a:xfrm>
-          <a:prstGeom prst="rect">
-            <a:avLst/>
-          </a:prstGeom>
-          <a:noFill/>
-        </p:spPr>
-        <p:txBody>
-          <a:bodyPr wrap="square" lIns="0" rIns="0" tIns="0" bIns="0" anchor="t">
-            <a:spAutoFit/>
-          </a:bodyPr>
-          <a:lstStyle/>
-          <a:p>
-            <a:pPr algn="l"/>
-            <a:r>
-              <a:rPr b="1" sz="3150" i="0" u="none">
-                <a:solidFill>
-                  <a:srgbClr val="2D3748"/>
-                </a:solidFill>
-                <a:latin typeface="Playfair Display"/>
-              </a:rPr>
-              <a:t>Memahami </a:t>
-            </a:r>
-            <a:r>
-              <a:rPr b="1" sz="3150" i="0" u="none">
-                <a:solidFill>
-                  <a:srgbClr val="C87A8A"/>
-                </a:solidFill>
-                <a:latin typeface="Playfair Display"/>
-              </a:rPr>
-              <a:t>Konsumen Bellabeat</a:t>
-            </a:r>
-          </a:p>
-        </p:txBody>
-      </p:sp>
-    </p:spTree>
-  </p:cSld>
-  <p:clrMapOvr>
-    <a:masterClrMapping/>
-  </p:clrMapOvr>
-</p:sld>
-</file>
-
-<file path=ppt/slides/slide4.xml><?xml version="1.0" encoding="utf-8"?>
-<p:sld xmlns:a="http://schemas.openxmlformats.org/drawingml/2006/main" xmlns:p="http://schemas.openxmlformats.org/presentationml/2006/main" xmlns:r="http://schemas.openxmlformats.org/officeDocument/2006/relationships">
-  <p:cSld>
-    <p:bg>
-      <p:bgPr>
-        <a:solidFill>
-          <a:srgbClr val="FFFFFF"/>
-        </a:solidFill>
-        <a:effectLst/>
-      </p:bgPr>
-    </p:bg>
-    <p:spTree>
-      <p:nvGrpSpPr>
-        <p:cNvPr id="1" name=""/>
-        <p:cNvGrpSpPr/>
-        <p:nvPr/>
-      </p:nvGrpSpPr>
-      <p:grpSpPr/>
-      <p:pic>
-        <p:nvPicPr>
-          <p:cNvPr id="2" name="Picture 1" descr="image.png"/>
-          <p:cNvPicPr>
-            <a:picLocks noChangeAspect="1"/>
-          </p:cNvPicPr>
-          <p:nvPr/>
-        </p:nvPicPr>
-        <p:blipFill>
-          <a:blip r:embed="rId2"/>
-          <a:stretch>
-            <a:fillRect/>
-          </a:stretch>
-        </p:blipFill>
-        <p:spPr>
-          <a:xfrm>
-            <a:off x="0" y="0"/>
-            <a:ext cx="12192000" cy="6858000"/>
-          </a:xfrm>
-          <a:prstGeom prst="rect">
-            <a:avLst/>
-          </a:prstGeom>
-        </p:spPr>
-      </p:pic>
-      <p:pic>
-        <p:nvPicPr>
-          <p:cNvPr id="3" name="Picture 2" descr="image.png"/>
-          <p:cNvPicPr>
-            <a:picLocks noChangeAspect="1"/>
-          </p:cNvPicPr>
-          <p:nvPr/>
-        </p:nvPicPr>
-        <p:blipFill>
-          <a:blip r:embed="rId3"/>
-          <a:stretch>
-            <a:fillRect/>
-          </a:stretch>
-        </p:blipFill>
-        <p:spPr>
-          <a:xfrm>
-            <a:off x="571500" y="2462212"/>
-            <a:ext cx="5238750" cy="2847826"/>
-          </a:xfrm>
-          <a:prstGeom prst="rect">
-            <a:avLst/>
-          </a:prstGeom>
-        </p:spPr>
-      </p:pic>
-      <p:pic>
-        <p:nvPicPr>
-          <p:cNvPr id="4" name="Picture 3" descr="image.png"/>
-          <p:cNvPicPr>
-            <a:picLocks noChangeAspect="1"/>
-          </p:cNvPicPr>
-          <p:nvPr/>
-        </p:nvPicPr>
-        <p:blipFill>
-          <a:blip r:embed="rId4"/>
-          <a:stretch>
-            <a:fillRect/>
-          </a:stretch>
-        </p:blipFill>
-        <p:spPr>
-          <a:xfrm>
-            <a:off x="6381750" y="2462212"/>
-            <a:ext cx="5238750" cy="2847826"/>
-          </a:xfrm>
-          <a:prstGeom prst="rect">
-            <a:avLst/>
-          </a:prstGeom>
-        </p:spPr>
-      </p:pic>
-      <p:sp>
-        <p:nvSpPr>
-          <p:cNvPr id="5" name="TextBox 4"/>
-          <p:cNvSpPr txBox="1"/>
-          <p:nvPr/>
-        </p:nvSpPr>
-        <p:spPr>
-          <a:xfrm>
-            <a:off x="962025" y="2852737"/>
-            <a:ext cx="4680585" cy="352425"/>
-          </a:xfrm>
-          <a:prstGeom prst="rect">
-            <a:avLst/>
-          </a:prstGeom>
-          <a:noFill/>
-        </p:spPr>
-        <p:txBody>
-          <a:bodyPr wrap="square" lIns="0" rIns="0" tIns="0" bIns="0" anchor="t">
-            <a:spAutoFit/>
-          </a:bodyPr>
-          <a:lstStyle/>
-          <a:p>
-            <a:pPr algn="l"/>
-            <a:r>
-              <a:rPr b="0" sz="2100" i="0" u="none">
-                <a:solidFill>
-                  <a:srgbClr val="2D3748"/>
-                </a:solidFill>
-                <a:latin typeface="Playfair Display SemiBold"/>
-              </a:rPr>
-              <a:t>1. Pemrosesan Data (SQL)</a:t>
-            </a:r>
-          </a:p>
-        </p:txBody>
-      </p:sp>
-      <p:sp>
-        <p:nvSpPr>
-          <p:cNvPr id="6" name="TextBox 5"/>
-          <p:cNvSpPr txBox="1"/>
-          <p:nvPr/>
-        </p:nvSpPr>
-        <p:spPr>
-          <a:xfrm>
-            <a:off x="962025" y="3376612"/>
-            <a:ext cx="4457700" cy="1371451"/>
-          </a:xfrm>
-          <a:prstGeom prst="rect">
-            <a:avLst/>
-          </a:prstGeom>
-          <a:noFill/>
-        </p:spPr>
-        <p:txBody>
-          <a:bodyPr wrap="square" lIns="0" rIns="0" tIns="0" bIns="0" anchor="t">
-            <a:spAutoFit/>
-          </a:bodyPr>
-          <a:lstStyle/>
-          <a:p>
-            <a:pPr algn="l">
-              <a:lnSpc>
-                <a:spcPts val="2160"/>
-              </a:lnSpc>
-            </a:pPr>
-            <a:r>
-              <a:rPr b="0" sz="1350" i="0" u="none">
-                <a:solidFill>
-                  <a:srgbClr val="4A5568"/>
-                </a:solidFill>
-                <a:latin typeface="DM Sans"/>
-              </a:rPr>
-              <a:t>Menggunakan SQLite untuk mengekstraksi, membersihkan, dan memvalidasi jutaan baris data mentah. Ini mencakup deteksi anomali nilai nol, penghapusan duplikasi, hingga ekstraksi string tanggal menjadi jam spesifik untuk analisis </a:t>
-            </a:r>
-            <a:r>
-              <a:rPr b="0" sz="1350" i="1" u="none">
-                <a:solidFill>
-                  <a:srgbClr val="4A5568"/>
-                </a:solidFill>
-                <a:latin typeface="DM Sans"/>
-              </a:rPr>
-              <a:t>intraday</a:t>
-            </a:r>
-            <a:r>
-              <a:rPr b="0" sz="1350" i="0" u="none">
-                <a:solidFill>
-                  <a:srgbClr val="4A5568"/>
-                </a:solidFill>
-                <a:latin typeface="DM Sans"/>
-              </a:rPr>
-              <a:t> yang presisi.</a:t>
-            </a:r>
-          </a:p>
-        </p:txBody>
-      </p:sp>
-      <p:sp>
-        <p:nvSpPr>
-          <p:cNvPr id="7" name="TextBox 6"/>
-          <p:cNvSpPr txBox="1"/>
-          <p:nvPr/>
-        </p:nvSpPr>
-        <p:spPr>
-          <a:xfrm>
-            <a:off x="6772275" y="2852737"/>
-            <a:ext cx="4680585" cy="352425"/>
-          </a:xfrm>
-          <a:prstGeom prst="rect">
-            <a:avLst/>
-          </a:prstGeom>
-          <a:noFill/>
-        </p:spPr>
-        <p:txBody>
-          <a:bodyPr wrap="square" lIns="0" rIns="0" tIns="0" bIns="0" anchor="t">
-            <a:spAutoFit/>
-          </a:bodyPr>
-          <a:lstStyle/>
-          <a:p>
-            <a:pPr algn="l"/>
-            <a:r>
-              <a:rPr b="0" sz="2100" i="0" u="none">
-                <a:solidFill>
-                  <a:srgbClr val="2D3748"/>
-                </a:solidFill>
-                <a:latin typeface="Playfair Display SemiBold"/>
-              </a:rPr>
-              <a:t>2. Visualisasi (Tableau)</a:t>
-            </a:r>
-          </a:p>
-        </p:txBody>
-      </p:sp>
-      <p:sp>
-        <p:nvSpPr>
-          <p:cNvPr id="8" name="TextBox 7"/>
-          <p:cNvSpPr txBox="1"/>
-          <p:nvPr/>
-        </p:nvSpPr>
-        <p:spPr>
-          <a:xfrm>
-            <a:off x="6772275" y="3376612"/>
-            <a:ext cx="4457700" cy="1371451"/>
-          </a:xfrm>
-          <a:prstGeom prst="rect">
-            <a:avLst/>
-          </a:prstGeom>
-          <a:noFill/>
-        </p:spPr>
-        <p:txBody>
-          <a:bodyPr wrap="square" lIns="0" rIns="0" tIns="0" bIns="0" anchor="t">
-            <a:spAutoFit/>
-          </a:bodyPr>
-          <a:lstStyle/>
-          <a:p>
-            <a:pPr algn="l">
-              <a:lnSpc>
-                <a:spcPts val="2160"/>
-              </a:lnSpc>
-            </a:pPr>
-            <a:r>
-              <a:rPr b="0" sz="1350" i="0" u="none">
-                <a:solidFill>
-                  <a:srgbClr val="4A5568"/>
-                </a:solidFill>
-                <a:latin typeface="DM Sans"/>
-              </a:rPr>
-              <a:t>Menerjemahkan tabel hasil query yang rumit menjadi </a:t>
-            </a:r>
-            <a:r>
-              <a:rPr b="0" sz="1350" i="1" u="none">
-                <a:solidFill>
-                  <a:srgbClr val="4A5568"/>
-                </a:solidFill>
-                <a:latin typeface="DM Sans"/>
-              </a:rPr>
-              <a:t>dashboard</a:t>
-            </a:r>
-            <a:r>
-              <a:rPr b="0" sz="1350" i="0" u="none">
-                <a:solidFill>
-                  <a:srgbClr val="4A5568"/>
-                </a:solidFill>
-                <a:latin typeface="DM Sans"/>
-              </a:rPr>
-              <a:t> analitik interaktif. Pendekatan visualisasi ini dirancang untuk menyoroti tren utama secara instan, memfasilitasi pengambilan keputusan strategis tingkat eksekutif dengan cepat dan akurat.</a:t>
-            </a:r>
-          </a:p>
-        </p:txBody>
-      </p:sp>
-      <p:sp>
-        <p:nvSpPr>
-          <p:cNvPr id="9" name="TextBox 8"/>
-          <p:cNvSpPr txBox="1"/>
-          <p:nvPr/>
-        </p:nvSpPr>
-        <p:spPr>
-          <a:xfrm>
-            <a:off x="571500" y="571500"/>
-            <a:ext cx="11601450" cy="533400"/>
-          </a:xfrm>
-          <a:prstGeom prst="rect">
-            <a:avLst/>
-          </a:prstGeom>
-          <a:noFill/>
-        </p:spPr>
-        <p:txBody>
-          <a:bodyPr wrap="square" lIns="0" rIns="0" tIns="0" bIns="0" anchor="t">
-            <a:spAutoFit/>
-          </a:bodyPr>
-          <a:lstStyle/>
-          <a:p>
-            <a:pPr algn="l"/>
-            <a:r>
-              <a:rPr b="1" sz="3150" i="0" u="none">
-                <a:solidFill>
-                  <a:srgbClr val="2D3748"/>
-                </a:solidFill>
-                <a:latin typeface="Playfair Display"/>
-              </a:rPr>
-              <a:t>Metodologi </a:t>
-            </a:r>
-            <a:r>
-              <a:rPr b="1" sz="3150" i="0" u="none">
-                <a:solidFill>
-                  <a:srgbClr val="C87A8A"/>
-                </a:solidFill>
-                <a:latin typeface="Playfair Display"/>
-              </a:rPr>
-              <a:t>Analisis</a:t>
-            </a:r>
-          </a:p>
-        </p:txBody>
-      </p:sp>
-    </p:spTree>
-  </p:cSld>
-  <p:clrMapOvr>
-    <a:masterClrMapping/>
-  </p:clrMapOvr>
-</p:sld>
-</file>
-
-<file path=ppt/slides/slide5.xml><?xml version="1.0" encoding="utf-8"?>
-<p:sld xmlns:a="http://schemas.openxmlformats.org/drawingml/2006/main" xmlns:p="http://schemas.openxmlformats.org/presentationml/2006/main" xmlns:r="http://schemas.openxmlformats.org/officeDocument/2006/relationships">
-  <p:cSld>
-    <p:bg>
-      <p:bgPr>
-        <a:solidFill>
-          <a:srgbClr val="FFFFFF"/>
-        </a:solidFill>
-        <a:effectLst/>
-      </p:bgPr>
-    </p:bg>
-    <p:spTree>
-      <p:nvGrpSpPr>
-        <p:cNvPr id="1" name=""/>
-        <p:cNvGrpSpPr/>
-        <p:nvPr/>
-      </p:nvGrpSpPr>
-      <p:grpSpPr/>
-      <p:pic>
-        <p:nvPicPr>
-          <p:cNvPr id="2" name="Picture 1" descr="image.png"/>
-          <p:cNvPicPr>
-            <a:picLocks noChangeAspect="1"/>
-          </p:cNvPicPr>
-          <p:nvPr/>
-        </p:nvPicPr>
-        <p:blipFill>
-          <a:blip r:embed="rId2"/>
-          <a:stretch>
-            <a:fillRect/>
-          </a:stretch>
-        </p:blipFill>
-        <p:spPr>
-          <a:xfrm>
-            <a:off x="0" y="0"/>
-            <a:ext cx="12192000" cy="6858000"/>
-          </a:xfrm>
-          <a:prstGeom prst="rect">
-            <a:avLst/>
-          </a:prstGeom>
-        </p:spPr>
-      </p:pic>
-      <p:sp>
-        <p:nvSpPr>
-          <p:cNvPr id="3" name="TextBox 2"/>
-          <p:cNvSpPr txBox="1"/>
-          <p:nvPr/>
-        </p:nvSpPr>
-        <p:spPr>
-          <a:xfrm>
-            <a:off x="3465671" y="2306091"/>
-            <a:ext cx="5260657" cy="714375"/>
-          </a:xfrm>
-          <a:prstGeom prst="rect">
-            <a:avLst/>
-          </a:prstGeom>
-          <a:noFill/>
-        </p:spPr>
-        <p:txBody>
-          <a:bodyPr wrap="square" lIns="0" rIns="0" tIns="0" bIns="0" anchor="t">
-            <a:spAutoFit/>
-          </a:bodyPr>
-          <a:lstStyle/>
-          <a:p>
-            <a:pPr algn="ctr"/>
-            <a:r>
-              <a:rPr b="1" sz="4200" i="0" u="none">
-                <a:solidFill>
-                  <a:srgbClr val="2D3748"/>
-                </a:solidFill>
-                <a:latin typeface="Playfair Display"/>
-              </a:rPr>
-              <a:t>Temuan Utama Data</a:t>
-            </a:r>
-          </a:p>
-        </p:txBody>
-      </p:sp>
-      <p:sp>
-        <p:nvSpPr>
-          <p:cNvPr id="4" name="Rectangle 3"/>
+              <a:rPr sz="1300" b="0">
+                <a:solidFill>
+                  <a:srgbClr val="6B7280"/>
+                </a:solidFill>
+                <a:latin typeface="Calibri"/>
+              </a:rPr>
+              <a:t>hari rata-rata per pengguna</a:t>
+            </a:r>
+          </a:p>
+        </p:txBody>
+      </p:sp>
+      <p:sp>
+        <p:nvSpPr>
+          <p:cNvPr id="14" name="Rectangle 13"/>
           <p:cNvSpPr/>
           <p:nvPr/>
         </p:nvSpPr>
         <p:spPr>
           <a:xfrm>
-            <a:off x="5715000" y="3496716"/>
-            <a:ext cx="762000" cy="38100"/>
+            <a:off x="9144000" y="3246120"/>
+            <a:ext cx="2423160" cy="1371600"/>
           </a:xfrm>
           <a:prstGeom prst="rect">
             <a:avLst/>
           </a:prstGeom>
           <a:solidFill>
-            <a:srgbClr val="C87A8A"/>
+            <a:srgbClr val="FBF4F6"/>
           </a:solidFill>
           <a:ln>
             <a:noFill/>
           </a:ln>
-          <a:effectLst/>
         </p:spPr>
         <p:style>
           <a:lnRef idx="1">
@@ -5545,14 +3897,14 @@
       </p:sp>
       <p:sp>
         <p:nvSpPr>
-          <p:cNvPr id="5" name="TextBox 4"/>
+          <p:cNvPr id="15" name="TextBox 14"/>
           <p:cNvSpPr txBox="1"/>
           <p:nvPr/>
         </p:nvSpPr>
         <p:spPr>
           <a:xfrm>
-            <a:off x="2286000" y="3820566"/>
-            <a:ext cx="7620000" cy="731341"/>
+            <a:off x="9326880" y="3383279"/>
+            <a:ext cx="2103120" cy="640080"/>
           </a:xfrm>
           <a:prstGeom prst="rect">
             <a:avLst/>
@@ -5560,24 +3912,648 @@
           <a:noFill/>
         </p:spPr>
         <p:txBody>
-          <a:bodyPr wrap="square" lIns="0" rIns="0" tIns="0" bIns="0" anchor="t">
+          <a:bodyPr wrap="square">
             <a:spAutoFit/>
           </a:bodyPr>
           <a:lstStyle/>
           <a:p>
-            <a:pPr algn="ctr">
-              <a:lnSpc>
-                <a:spcPts val="2879"/>
-              </a:lnSpc>
+            <a:pPr>
+              <a:spcAft>
+                <a:spcPts val="1000"/>
+              </a:spcAft>
             </a:pPr>
             <a:r>
-              <a:rPr b="0" sz="1800" i="0" u="none">
-                <a:solidFill>
-                  <a:srgbClr val="718096"/>
-                </a:solidFill>
-                <a:latin typeface="DM Sans"/>
-              </a:rPr>
-              <a:t>Insight perilaku dari proses klasifikasi harian, pelacakan tidur, dan fluktuasi aktivitas per jam.</a:t>
+              <a:rPr sz="3000" b="1">
+                <a:solidFill>
+                  <a:srgbClr val="B85C74"/>
+                </a:solidFill>
+                <a:latin typeface="Calibri"/>
+              </a:rPr>
+              <a:t>61</a:t>
+            </a:r>
+          </a:p>
+        </p:txBody>
+      </p:sp>
+      <p:sp>
+        <p:nvSpPr>
+          <p:cNvPr id="16" name="TextBox 15"/>
+          <p:cNvSpPr txBox="1"/>
+          <p:nvPr/>
+        </p:nvSpPr>
+        <p:spPr>
+          <a:xfrm>
+            <a:off x="9326880" y="4069080"/>
+            <a:ext cx="2103120" cy="457200"/>
+          </a:xfrm>
+          <a:prstGeom prst="rect">
+            <a:avLst/>
+          </a:prstGeom>
+          <a:noFill/>
+        </p:spPr>
+        <p:txBody>
+          <a:bodyPr wrap="square">
+            <a:spAutoFit/>
+          </a:bodyPr>
+          <a:lstStyle/>
+          <a:p>
+            <a:pPr>
+              <a:spcAft>
+                <a:spcPts val="1000"/>
+              </a:spcAft>
+            </a:pPr>
+            <a:r>
+              <a:rPr sz="1300" b="0">
+                <a:solidFill>
+                  <a:srgbClr val="6B7280"/>
+                </a:solidFill>
+                <a:latin typeface="Calibri"/>
+              </a:rPr>
+              <a:t>hari dengan 0 langkah</a:t>
+            </a:r>
+          </a:p>
+        </p:txBody>
+      </p:sp>
+    </p:spTree>
+  </p:cSld>
+  <p:clrMapOvr>
+    <a:masterClrMapping/>
+  </p:clrMapOvr>
+</p:sld>
+</file>
+
+<file path=ppt/slides/slide3.xml><?xml version="1.0" encoding="utf-8"?>
+<p:sld xmlns:a="http://schemas.openxmlformats.org/drawingml/2006/main" xmlns:p="http://schemas.openxmlformats.org/presentationml/2006/main" xmlns:r="http://schemas.openxmlformats.org/officeDocument/2006/relationships">
+  <p:cSld>
+    <p:spTree>
+      <p:nvGrpSpPr>
+        <p:cNvPr id="1" name=""/>
+        <p:cNvGrpSpPr/>
+        <p:nvPr/>
+      </p:nvGrpSpPr>
+      <p:grpSpPr/>
+      <p:sp>
+        <p:nvSpPr>
+          <p:cNvPr id="2" name="TextBox 1"/>
+          <p:cNvSpPr txBox="1"/>
+          <p:nvPr/>
+        </p:nvSpPr>
+        <p:spPr>
+          <a:xfrm>
+            <a:off x="548640" y="320040"/>
+            <a:ext cx="10972800" cy="365760"/>
+          </a:xfrm>
+          <a:prstGeom prst="rect">
+            <a:avLst/>
+          </a:prstGeom>
+          <a:noFill/>
+        </p:spPr>
+        <p:txBody>
+          <a:bodyPr wrap="square">
+            <a:spAutoFit/>
+          </a:bodyPr>
+          <a:lstStyle/>
+          <a:p>
+            <a:pPr>
+              <a:spcAft>
+                <a:spcPts val="1000"/>
+              </a:spcAft>
+            </a:pPr>
+            <a:r>
+              <a:rPr sz="1100" b="1">
+                <a:solidFill>
+                  <a:srgbClr val="B85C74"/>
+                </a:solidFill>
+                <a:latin typeface="Calibri"/>
+              </a:rPr>
+              <a:t>PROSES</a:t>
+            </a:r>
+          </a:p>
+        </p:txBody>
+      </p:sp>
+      <p:sp>
+        <p:nvSpPr>
+          <p:cNvPr id="3" name="TextBox 2"/>
+          <p:cNvSpPr txBox="1"/>
+          <p:nvPr/>
+        </p:nvSpPr>
+        <p:spPr>
+          <a:xfrm>
+            <a:off x="548640" y="640080"/>
+            <a:ext cx="11064240" cy="731520"/>
+          </a:xfrm>
+          <a:prstGeom prst="rect">
+            <a:avLst/>
+          </a:prstGeom>
+          <a:noFill/>
+        </p:spPr>
+        <p:txBody>
+          <a:bodyPr wrap="square">
+            <a:spAutoFit/>
+          </a:bodyPr>
+          <a:lstStyle/>
+          <a:p>
+            <a:pPr>
+              <a:spcAft>
+                <a:spcPts val="1000"/>
+              </a:spcAft>
+            </a:pPr>
+            <a:r>
+              <a:rPr sz="2800" b="1">
+                <a:solidFill>
+                  <a:srgbClr val="1F2937"/>
+                </a:solidFill>
+                <a:latin typeface="Calibri"/>
+              </a:rPr>
+              <a:t>Metode</a:t>
+            </a:r>
+          </a:p>
+        </p:txBody>
+      </p:sp>
+      <p:sp>
+        <p:nvSpPr>
+          <p:cNvPr id="4" name="TextBox 3"/>
+          <p:cNvSpPr txBox="1"/>
+          <p:nvPr/>
+        </p:nvSpPr>
+        <p:spPr>
+          <a:xfrm>
+            <a:off x="548640" y="1645920"/>
+            <a:ext cx="10972800" cy="4572000"/>
+          </a:xfrm>
+          <a:prstGeom prst="rect">
+            <a:avLst/>
+          </a:prstGeom>
+          <a:noFill/>
+        </p:spPr>
+        <p:txBody>
+          <a:bodyPr wrap="square">
+            <a:spAutoFit/>
+          </a:bodyPr>
+          <a:lstStyle/>
+          <a:p>
+            <a:pPr>
+              <a:spcAft>
+                <a:spcPts val="1000"/>
+              </a:spcAft>
+            </a:pPr>
+            <a:r>
+              <a:rPr sz="1600" b="1">
+                <a:solidFill>
+                  <a:srgbClr val="1F2937"/>
+                </a:solidFill>
+                <a:latin typeface="Calibri"/>
+              </a:rPr>
+              <a:t>Pemeriksaan data (SQL). </a:t>
+            </a:r>
+            <a:r>
+              <a:rPr sz="1600" b="0">
+                <a:solidFill>
+                  <a:srgbClr val="1F2937"/>
+                </a:solidFill>
+                <a:latin typeface="Calibri"/>
+              </a:rPr>
+              <a:t>35 pengguna, 457 baris, tidak ada duplikat Id + tanggal. 61 hari (13%) mencatat 0 langkah, artinya alat tidak dipakai.</a:t>
+            </a:r>
+          </a:p>
+          <a:p>
+            <a:pPr>
+              <a:spcAft>
+                <a:spcPts val="1000"/>
+              </a:spcAft>
+            </a:pPr>
+            <a:r>
+              <a:rPr sz="1600" b="1">
+                <a:solidFill>
+                  <a:srgbClr val="1F2937"/>
+                </a:solidFill>
+                <a:latin typeface="Calibri"/>
+              </a:rPr>
+              <a:t>Hari dipakai saja. </a:t>
+            </a:r>
+            <a:r>
+              <a:rPr sz="1600" b="0">
+                <a:solidFill>
+                  <a:srgbClr val="1F2937"/>
+                </a:solidFill>
+                <a:latin typeface="Calibri"/>
+              </a:rPr>
+              <a:t>Rata-rata dan segmen dihitung dari 396 hari ketika alat dipakai (langkah &gt; 0). Jika hari kosong ikut dihitung, rata-rata langkah turun dan pengguna yang jarang memakai alat terlihat lebih malas dari kenyataannya.</a:t>
+            </a:r>
+          </a:p>
+          <a:p>
+            <a:pPr>
+              <a:spcAft>
+                <a:spcPts val="1000"/>
+              </a:spcAft>
+            </a:pPr>
+            <a:r>
+              <a:rPr sz="1600" b="1">
+                <a:solidFill>
+                  <a:srgbClr val="1F2937"/>
+                </a:solidFill>
+                <a:latin typeface="Calibri"/>
+              </a:rPr>
+              <a:t>Segmentasi. </a:t>
+            </a:r>
+            <a:r>
+              <a:rPr sz="1600" b="0">
+                <a:solidFill>
+                  <a:srgbClr val="1F2937"/>
+                </a:solidFill>
+                <a:latin typeface="Calibri"/>
+              </a:rPr>
+              <a:t>Rata-rata langkah harian per pengguna: Sedentary &lt; 5.000, Lightly Active 5.000–7.499, Fairly Active 7.500–9.999, Very Active ≥ 10.000.</a:t>
+            </a:r>
+          </a:p>
+          <a:p>
+            <a:pPr>
+              <a:spcAft>
+                <a:spcPts val="1000"/>
+              </a:spcAft>
+            </a:pPr>
+            <a:r>
+              <a:rPr sz="1600" b="1">
+                <a:solidFill>
+                  <a:srgbClr val="1F2937"/>
+                </a:solidFill>
+                <a:latin typeface="Calibri"/>
+              </a:rPr>
+              <a:t>Visualisasi. </a:t>
+            </a:r>
+            <a:r>
+              <a:rPr sz="1600" b="0">
+                <a:solidFill>
+                  <a:srgbClr val="1F2937"/>
+                </a:solidFill>
+                <a:latin typeface="Calibri"/>
+              </a:rPr>
+              <a:t>Dashboard Power BI (model TMDL di repo) dan Tableau Public.</a:t>
+            </a:r>
+          </a:p>
+        </p:txBody>
+      </p:sp>
+    </p:spTree>
+  </p:cSld>
+  <p:clrMapOvr>
+    <a:masterClrMapping/>
+  </p:clrMapOvr>
+</p:sld>
+</file>
+
+<file path=ppt/slides/slide4.xml><?xml version="1.0" encoding="utf-8"?>
+<p:sld xmlns:a="http://schemas.openxmlformats.org/drawingml/2006/main" xmlns:p="http://schemas.openxmlformats.org/presentationml/2006/main" xmlns:r="http://schemas.openxmlformats.org/officeDocument/2006/relationships">
+  <p:cSld>
+    <p:spTree>
+      <p:nvGrpSpPr>
+        <p:cNvPr id="1" name=""/>
+        <p:cNvGrpSpPr/>
+        <p:nvPr/>
+      </p:nvGrpSpPr>
+      <p:grpSpPr/>
+      <p:sp>
+        <p:nvSpPr>
+          <p:cNvPr id="2" name="TextBox 1"/>
+          <p:cNvSpPr txBox="1"/>
+          <p:nvPr/>
+        </p:nvSpPr>
+        <p:spPr>
+          <a:xfrm>
+            <a:off x="548640" y="320040"/>
+            <a:ext cx="10972800" cy="365760"/>
+          </a:xfrm>
+          <a:prstGeom prst="rect">
+            <a:avLst/>
+          </a:prstGeom>
+          <a:noFill/>
+        </p:spPr>
+        <p:txBody>
+          <a:bodyPr wrap="square">
+            <a:spAutoFit/>
+          </a:bodyPr>
+          <a:lstStyle/>
+          <a:p>
+            <a:pPr>
+              <a:spcAft>
+                <a:spcPts val="1000"/>
+              </a:spcAft>
+            </a:pPr>
+            <a:r>
+              <a:rPr sz="1100" b="1">
+                <a:solidFill>
+                  <a:srgbClr val="B85C74"/>
+                </a:solidFill>
+                <a:latin typeface="Calibri"/>
+              </a:rPr>
+              <a:t>SEGMEN PENGGUNA</a:t>
+            </a:r>
+          </a:p>
+        </p:txBody>
+      </p:sp>
+      <p:sp>
+        <p:nvSpPr>
+          <p:cNvPr id="3" name="TextBox 2"/>
+          <p:cNvSpPr txBox="1"/>
+          <p:nvPr/>
+        </p:nvSpPr>
+        <p:spPr>
+          <a:xfrm>
+            <a:off x="548640" y="640080"/>
+            <a:ext cx="11064240" cy="731520"/>
+          </a:xfrm>
+          <a:prstGeom prst="rect">
+            <a:avLst/>
+          </a:prstGeom>
+          <a:noFill/>
+        </p:spPr>
+        <p:txBody>
+          <a:bodyPr wrap="square">
+            <a:spAutoFit/>
+          </a:bodyPr>
+          <a:lstStyle/>
+          <a:p>
+            <a:pPr>
+              <a:spcAft>
+                <a:spcPts val="1000"/>
+              </a:spcAft>
+            </a:pPr>
+            <a:r>
+              <a:rPr sz="2800" b="1">
+                <a:solidFill>
+                  <a:srgbClr val="1F2937"/>
+                </a:solidFill>
+                <a:latin typeface="Calibri"/>
+              </a:rPr>
+              <a:t>Sekitar sepertiga pengguna tergolong sedentary</a:t>
+            </a:r>
+          </a:p>
+        </p:txBody>
+      </p:sp>
+      <p:pic>
+        <p:nvPicPr>
+          <p:cNvPr id="4" name="Picture 3" descr="deck_segments.png"/>
+          <p:cNvPicPr>
+            <a:picLocks noChangeAspect="1"/>
+          </p:cNvPicPr>
+          <p:nvPr/>
+        </p:nvPicPr>
+        <p:blipFill>
+          <a:blip r:embed="rId2"/>
+          <a:stretch>
+            <a:fillRect/>
+          </a:stretch>
+        </p:blipFill>
+        <p:spPr>
+          <a:xfrm>
+            <a:off x="548640" y="1600200"/>
+            <a:ext cx="6583680" cy="3175657"/>
+          </a:xfrm>
+          <a:prstGeom prst="rect">
+            <a:avLst/>
+          </a:prstGeom>
+        </p:spPr>
+      </p:pic>
+      <p:sp>
+        <p:nvSpPr>
+          <p:cNvPr id="5" name="TextBox 4"/>
+          <p:cNvSpPr txBox="1"/>
+          <p:nvPr/>
+        </p:nvSpPr>
+        <p:spPr>
+          <a:xfrm>
+            <a:off x="7498079" y="1645920"/>
+            <a:ext cx="4206240" cy="4754880"/>
+          </a:xfrm>
+          <a:prstGeom prst="rect">
+            <a:avLst/>
+          </a:prstGeom>
+          <a:noFill/>
+        </p:spPr>
+        <p:txBody>
+          <a:bodyPr wrap="square">
+            <a:spAutoFit/>
+          </a:bodyPr>
+          <a:lstStyle/>
+          <a:p>
+            <a:pPr>
+              <a:spcAft>
+                <a:spcPts val="1000"/>
+              </a:spcAft>
+            </a:pPr>
+            <a:r>
+              <a:rPr sz="1500" b="0">
+                <a:solidFill>
+                  <a:srgbClr val="1F2937"/>
+                </a:solidFill>
+                <a:latin typeface="Calibri"/>
+              </a:rPr>
+              <a:t>12 dari 34 pengguna (35%) rata-rata berjalan di bawah 5.000 langkah pada hari mereka memakai alat. Ini kelompok terbesar.</a:t>
+            </a:r>
+          </a:p>
+          <a:p>
+            <a:pPr>
+              <a:spcAft>
+                <a:spcPts val="1000"/>
+              </a:spcAft>
+            </a:pPr>
+            <a:r>
+              <a:rPr sz="1500" b="0">
+                <a:solidFill>
+                  <a:srgbClr val="1F2937"/>
+                </a:solidFill>
+                <a:latin typeface="Calibri"/>
+              </a:rPr>
+              <a:t>Rata-rata seluruh pengguna 7.555 langkah per hari, dan hanya 32% hari yang mencapai 10.000 langkah.</a:t>
+            </a:r>
+          </a:p>
+          <a:p>
+            <a:pPr>
+              <a:spcAft>
+                <a:spcPts val="1000"/>
+              </a:spcAft>
+            </a:pPr>
+            <a:r>
+              <a:rPr sz="1500" b="0">
+                <a:solidFill>
+                  <a:srgbClr val="1F2937"/>
+                </a:solidFill>
+                <a:latin typeface="Calibri"/>
+              </a:rPr>
+              <a:t>Satu pengguna tidak pernah memakai alat (semua hari 0 langkah), sehingga segmen dihitung dari 34 pengguna.</a:t>
+            </a:r>
+          </a:p>
+        </p:txBody>
+      </p:sp>
+    </p:spTree>
+  </p:cSld>
+  <p:clrMapOvr>
+    <a:masterClrMapping/>
+  </p:clrMapOvr>
+</p:sld>
+</file>
+
+<file path=ppt/slides/slide5.xml><?xml version="1.0" encoding="utf-8"?>
+<p:sld xmlns:a="http://schemas.openxmlformats.org/drawingml/2006/main" xmlns:p="http://schemas.openxmlformats.org/presentationml/2006/main" xmlns:r="http://schemas.openxmlformats.org/officeDocument/2006/relationships">
+  <p:cSld>
+    <p:spTree>
+      <p:nvGrpSpPr>
+        <p:cNvPr id="1" name=""/>
+        <p:cNvGrpSpPr/>
+        <p:nvPr/>
+      </p:nvGrpSpPr>
+      <p:grpSpPr/>
+      <p:sp>
+        <p:nvSpPr>
+          <p:cNvPr id="2" name="TextBox 1"/>
+          <p:cNvSpPr txBox="1"/>
+          <p:nvPr/>
+        </p:nvSpPr>
+        <p:spPr>
+          <a:xfrm>
+            <a:off x="548640" y="320040"/>
+            <a:ext cx="10972800" cy="365760"/>
+          </a:xfrm>
+          <a:prstGeom prst="rect">
+            <a:avLst/>
+          </a:prstGeom>
+          <a:noFill/>
+        </p:spPr>
+        <p:txBody>
+          <a:bodyPr wrap="square">
+            <a:spAutoFit/>
+          </a:bodyPr>
+          <a:lstStyle/>
+          <a:p>
+            <a:pPr>
+              <a:spcAft>
+                <a:spcPts val="1000"/>
+              </a:spcAft>
+            </a:pPr>
+            <a:r>
+              <a:rPr sz="1100" b="1">
+                <a:solidFill>
+                  <a:srgbClr val="B85C74"/>
+                </a:solidFill>
+                <a:latin typeface="Calibri"/>
+              </a:rPr>
+              <a:t>POLA MINGGUAN</a:t>
+            </a:r>
+          </a:p>
+        </p:txBody>
+      </p:sp>
+      <p:sp>
+        <p:nvSpPr>
+          <p:cNvPr id="3" name="TextBox 2"/>
+          <p:cNvSpPr txBox="1"/>
+          <p:nvPr/>
+        </p:nvSpPr>
+        <p:spPr>
+          <a:xfrm>
+            <a:off x="548640" y="640080"/>
+            <a:ext cx="11064240" cy="731520"/>
+          </a:xfrm>
+          <a:prstGeom prst="rect">
+            <a:avLst/>
+          </a:prstGeom>
+          <a:noFill/>
+        </p:spPr>
+        <p:txBody>
+          <a:bodyPr wrap="square">
+            <a:spAutoFit/>
+          </a:bodyPr>
+          <a:lstStyle/>
+          <a:p>
+            <a:pPr>
+              <a:spcAft>
+                <a:spcPts val="1000"/>
+              </a:spcAft>
+            </a:pPr>
+            <a:r>
+              <a:rPr sz="2800" b="1">
+                <a:solidFill>
+                  <a:srgbClr val="1F2937"/>
+                </a:solidFill>
+                <a:latin typeface="Calibri"/>
+              </a:rPr>
+              <a:t>Selasa adalah hari paling pasif</a:t>
+            </a:r>
+          </a:p>
+        </p:txBody>
+      </p:sp>
+      <p:pic>
+        <p:nvPicPr>
+          <p:cNvPr id="4" name="Picture 3" descr="deck_weekday.png"/>
+          <p:cNvPicPr>
+            <a:picLocks noChangeAspect="1"/>
+          </p:cNvPicPr>
+          <p:nvPr/>
+        </p:nvPicPr>
+        <p:blipFill>
+          <a:blip r:embed="rId2"/>
+          <a:stretch>
+            <a:fillRect/>
+          </a:stretch>
+        </p:blipFill>
+        <p:spPr>
+          <a:xfrm>
+            <a:off x="548640" y="1600200"/>
+            <a:ext cx="6583680" cy="4096512"/>
+          </a:xfrm>
+          <a:prstGeom prst="rect">
+            <a:avLst/>
+          </a:prstGeom>
+        </p:spPr>
+      </p:pic>
+      <p:sp>
+        <p:nvSpPr>
+          <p:cNvPr id="5" name="TextBox 4"/>
+          <p:cNvSpPr txBox="1"/>
+          <p:nvPr/>
+        </p:nvSpPr>
+        <p:spPr>
+          <a:xfrm>
+            <a:off x="7498079" y="1645920"/>
+            <a:ext cx="4206240" cy="4754880"/>
+          </a:xfrm>
+          <a:prstGeom prst="rect">
+            <a:avLst/>
+          </a:prstGeom>
+          <a:noFill/>
+        </p:spPr>
+        <p:txBody>
+          <a:bodyPr wrap="square">
+            <a:spAutoFit/>
+          </a:bodyPr>
+          <a:lstStyle/>
+          <a:p>
+            <a:pPr>
+              <a:spcAft>
+                <a:spcPts val="1000"/>
+              </a:spcAft>
+            </a:pPr>
+            <a:r>
+              <a:rPr sz="1500" b="0">
+                <a:solidFill>
+                  <a:srgbClr val="1F2937"/>
+                </a:solidFill>
+                <a:latin typeface="Calibri"/>
+              </a:rPr>
+              <a:t>Rata-rata langkah hari Selasa 5.980, terendah dalam seminggu. Hari lain berkisar 7.150–8.204 langkah.</a:t>
+            </a:r>
+          </a:p>
+          <a:p>
+            <a:pPr>
+              <a:spcAft>
+                <a:spcPts val="1000"/>
+              </a:spcAft>
+            </a:pPr>
+            <a:r>
+              <a:rPr sz="1500" b="0">
+                <a:solidFill>
+                  <a:srgbClr val="1F2937"/>
+                </a:solidFill>
+                <a:latin typeface="Calibri"/>
+              </a:rPr>
+              <a:t>Waktu sedentary tercatat 15,7 jam per hari dipakai, dengan sekitar 32 menit aktivitas sedang-berat. Fitbit juga menghitung waktu tidur yang tidak tercatat sebagai sedentary, jadi angka ini bukan murni waktu duduk.</a:t>
             </a:r>
           </a:p>
         </p:txBody>
@@ -5593,14 +4569,6 @@
 <file path=ppt/slides/slide6.xml><?xml version="1.0" encoding="utf-8"?>
 <p:sld xmlns:a="http://schemas.openxmlformats.org/drawingml/2006/main" xmlns:p="http://schemas.openxmlformats.org/presentationml/2006/main" xmlns:r="http://schemas.openxmlformats.org/officeDocument/2006/relationships">
   <p:cSld>
-    <p:bg>
-      <p:bgPr>
-        <a:solidFill>
-          <a:srgbClr val="FFFFFF"/>
-        </a:solidFill>
-        <a:effectLst/>
-      </p:bgPr>
-    </p:bg>
     <p:spTree>
       <p:nvGrpSpPr>
         <p:cNvPr id="1" name=""/>
@@ -5608,9 +4576,87 @@
         <p:nvPr/>
       </p:nvGrpSpPr>
       <p:grpSpPr/>
+      <p:sp>
+        <p:nvSpPr>
+          <p:cNvPr id="2" name="TextBox 1"/>
+          <p:cNvSpPr txBox="1"/>
+          <p:nvPr/>
+        </p:nvSpPr>
+        <p:spPr>
+          <a:xfrm>
+            <a:off x="548640" y="320040"/>
+            <a:ext cx="10972800" cy="365760"/>
+          </a:xfrm>
+          <a:prstGeom prst="rect">
+            <a:avLst/>
+          </a:prstGeom>
+          <a:noFill/>
+        </p:spPr>
+        <p:txBody>
+          <a:bodyPr wrap="square">
+            <a:spAutoFit/>
+          </a:bodyPr>
+          <a:lstStyle/>
+          <a:p>
+            <a:pPr>
+              <a:spcAft>
+                <a:spcPts val="1000"/>
+              </a:spcAft>
+            </a:pPr>
+            <a:r>
+              <a:rPr sz="1100" b="1">
+                <a:solidFill>
+                  <a:srgbClr val="B85C74"/>
+                </a:solidFill>
+                <a:latin typeface="Calibri"/>
+              </a:rPr>
+              <a:t>KEBIASAAN MEMAKAI ALAT</a:t>
+            </a:r>
+          </a:p>
+        </p:txBody>
+      </p:sp>
+      <p:sp>
+        <p:nvSpPr>
+          <p:cNvPr id="3" name="TextBox 2"/>
+          <p:cNvSpPr txBox="1"/>
+          <p:nvPr/>
+        </p:nvSpPr>
+        <p:spPr>
+          <a:xfrm>
+            <a:off x="548640" y="640080"/>
+            <a:ext cx="11064240" cy="731520"/>
+          </a:xfrm>
+          <a:prstGeom prst="rect">
+            <a:avLst/>
+          </a:prstGeom>
+          <a:noFill/>
+        </p:spPr>
+        <p:txBody>
+          <a:bodyPr wrap="square">
+            <a:spAutoFit/>
+          </a:bodyPr>
+          <a:lstStyle/>
+          <a:p>
+            <a:pPr>
+              <a:spcAft>
+                <a:spcPts val="1000"/>
+              </a:spcAft>
+            </a:pPr>
+            <a:r>
+              <a:rPr sz="2800" b="1">
+                <a:solidFill>
+                  <a:srgbClr val="1F2937"/>
+                </a:solidFill>
+                <a:latin typeface="Calibri"/>
+              </a:rPr>
+              <a:t>13% hari alat tidak dipakai</a:t>
+            </a:r>
+          </a:p>
+        </p:txBody>
+      </p:sp>
       <p:pic>
         <p:nvPicPr>
-          <p:cNvPr id="2" name="Picture 1" descr="image.png"/>
+          <p:cNvPr id="4" name="Picture 3" descr="deck_step_bands.png"/>
           <p:cNvPicPr>
             <a:picLocks noChangeAspect="1"/>
           </p:cNvPicPr>
@@ -5624,62 +4670,14 @@
         </p:blipFill>
         <p:spPr>
           <a:xfrm>
-            <a:off x="0" y="0"/>
-            <a:ext cx="12192000" cy="6858000"/>
+            <a:off x="548640" y="1600200"/>
+            <a:ext cx="6583680" cy="4068436"/>
           </a:xfrm>
           <a:prstGeom prst="rect">
             <a:avLst/>
           </a:prstGeom>
         </p:spPr>
       </p:pic>
-      <p:pic>
-        <p:nvPicPr>
-          <p:cNvPr id="3" name="Picture 2" descr="image.png"/>
-          <p:cNvPicPr>
-            <a:picLocks noChangeAspect="1"/>
-          </p:cNvPicPr>
-          <p:nvPr/>
-        </p:nvPicPr>
-        <p:blipFill>
-          <a:blip r:embed="rId3"/>
-          <a:stretch>
-            <a:fillRect/>
-          </a:stretch>
-        </p:blipFill>
-        <p:spPr>
-          <a:xfrm>
-            <a:off x="571500" y="1240184"/>
-            <a:ext cx="11049000" cy="5292030"/>
-          </a:xfrm>
-          <a:prstGeom prst="rect">
-            <a:avLst/>
-          </a:prstGeom>
-        </p:spPr>
-      </p:pic>
-      <p:pic>
-        <p:nvPicPr>
-          <p:cNvPr id="4" name="Picture 3" descr="image.png"/>
-          <p:cNvPicPr>
-            <a:picLocks noChangeAspect="1"/>
-          </p:cNvPicPr>
-          <p:nvPr/>
-        </p:nvPicPr>
-        <p:blipFill>
-          <a:blip r:embed="rId4"/>
-          <a:stretch>
-            <a:fillRect/>
-          </a:stretch>
-        </p:blipFill>
-        <p:spPr>
-          <a:xfrm>
-            <a:off x="1123950" y="5431184"/>
-            <a:ext cx="9944100" cy="929580"/>
-          </a:xfrm>
-          <a:prstGeom prst="rect">
-            <a:avLst/>
-          </a:prstGeom>
-        </p:spPr>
-      </p:pic>
       <p:sp>
         <p:nvSpPr>
           <p:cNvPr id="5" name="TextBox 4"/>
@@ -5688,8 +4686,8 @@
         </p:nvSpPr>
         <p:spPr>
           <a:xfrm>
-            <a:off x="571500" y="325784"/>
-            <a:ext cx="11601450" cy="533400"/>
+            <a:off x="7498079" y="1645920"/>
+            <a:ext cx="4206240" cy="4754880"/>
           </a:xfrm>
           <a:prstGeom prst="rect">
             <a:avLst/>
@@ -5697,29 +4695,56 @@
           <a:noFill/>
         </p:spPr>
         <p:txBody>
-          <a:bodyPr wrap="square" lIns="0" rIns="0" tIns="0" bIns="0" anchor="t">
+          <a:bodyPr wrap="square">
             <a:spAutoFit/>
           </a:bodyPr>
           <a:lstStyle/>
           <a:p>
-            <a:pPr algn="l"/>
-            <a:r>
-              <a:rPr b="1" sz="3150" i="0" u="none">
-                <a:solidFill>
-                  <a:srgbClr val="2D3748"/>
-                </a:solidFill>
-                <a:latin typeface="Playfair Display"/>
-              </a:rPr>
-              <a:t>Dominasi Segmen </a:t>
-            </a:r>
-            <a:r>
-              <a:rPr b="1" sz="3150" i="0" u="none">
-                <a:solidFill>
-                  <a:srgbClr val="C87A8A"/>
-                </a:solidFill>
-                <a:latin typeface="Playfair Display"/>
-              </a:rPr>
-              <a:t>Sedentary</a:t>
+            <a:pPr>
+              <a:spcAft>
+                <a:spcPts val="1000"/>
+              </a:spcAft>
+            </a:pPr>
+            <a:r>
+              <a:rPr sz="1500" b="0">
+                <a:solidFill>
+                  <a:srgbClr val="1F2937"/>
+                </a:solidFill>
+                <a:latin typeface="Calibri"/>
+              </a:rPr>
+              <a:t>61 dari 457 hari mencatat 0 langkah, berasal dari 14 dari 35 pengguna.</a:t>
+            </a:r>
+          </a:p>
+          <a:p>
+            <a:pPr>
+              <a:spcAft>
+                <a:spcPts val="1000"/>
+              </a:spcAft>
+            </a:pPr>
+            <a:r>
+              <a:rPr sz="1500" b="0">
+                <a:solidFill>
+                  <a:srgbClr val="1F2937"/>
+                </a:solidFill>
+                <a:latin typeface="Calibri"/>
+              </a:rPr>
+              <a:t>Data tidur (tabel terpisah, tidak termasuk di repo ini) hanya tercatat untuk 23 dari 35 pengguna.</a:t>
+            </a:r>
+          </a:p>
+          <a:p>
+            <a:pPr>
+              <a:spcAft>
+                <a:spcPts val="1000"/>
+              </a:spcAft>
+            </a:pPr>
+            <a:r>
+              <a:rPr sz="1500" b="0">
+                <a:solidFill>
+                  <a:srgbClr val="1F2937"/>
+                </a:solidFill>
+                <a:latin typeface="Calibri"/>
+              </a:rPr>
+              <a:t>Kemungkinan penyebab: alat tidak nyaman dipakai terus-menerus atau dilepas untuk diisi daya. Data ini tidak bisa membuktikan penyebabnya.</a:t>
             </a:r>
           </a:p>
         </p:txBody>
@@ -5735,14 +4760,6 @@
 <file path=ppt/slides/slide7.xml><?xml version="1.0" encoding="utf-8"?>
 <p:sld xmlns:a="http://schemas.openxmlformats.org/drawingml/2006/main" xmlns:p="http://schemas.openxmlformats.org/presentationml/2006/main" xmlns:r="http://schemas.openxmlformats.org/officeDocument/2006/relationships">
   <p:cSld>
-    <p:bg>
-      <p:bgPr>
-        <a:solidFill>
-          <a:srgbClr val="FFFFFF"/>
-        </a:solidFill>
-        <a:effectLst/>
-      </p:bgPr>
-    </p:bg>
     <p:spTree>
       <p:nvGrpSpPr>
         <p:cNvPr id="1" name=""/>
@@ -5750,88 +4767,16 @@
         <p:nvPr/>
       </p:nvGrpSpPr>
       <p:grpSpPr/>
-      <p:pic>
-        <p:nvPicPr>
-          <p:cNvPr id="2" name="Picture 1" descr="image.png"/>
-          <p:cNvPicPr>
-            <a:picLocks noChangeAspect="1"/>
-          </p:cNvPicPr>
-          <p:nvPr/>
-        </p:nvPicPr>
-        <p:blipFill>
-          <a:blip r:embed="rId2"/>
-          <a:stretch>
-            <a:fillRect/>
-          </a:stretch>
-        </p:blipFill>
-        <p:spPr>
-          <a:xfrm>
-            <a:off x="0" y="0"/>
-            <a:ext cx="12192000" cy="6858000"/>
-          </a:xfrm>
-          <a:prstGeom prst="rect">
-            <a:avLst/>
-          </a:prstGeom>
-        </p:spPr>
-      </p:pic>
-      <p:pic>
-        <p:nvPicPr>
-          <p:cNvPr id="3" name="Picture 2" descr="image.png"/>
-          <p:cNvPicPr>
-            <a:picLocks noChangeAspect="1"/>
-          </p:cNvPicPr>
-          <p:nvPr/>
-        </p:nvPicPr>
-        <p:blipFill>
-          <a:blip r:embed="rId3"/>
-          <a:stretch>
-            <a:fillRect/>
-          </a:stretch>
-        </p:blipFill>
-        <p:spPr>
-          <a:xfrm>
-            <a:off x="571500" y="965001"/>
-            <a:ext cx="11049000" cy="5842545"/>
-          </a:xfrm>
-          <a:prstGeom prst="rect">
-            <a:avLst/>
-          </a:prstGeom>
-        </p:spPr>
-      </p:pic>
-      <p:pic>
-        <p:nvPicPr>
-          <p:cNvPr id="4" name="Picture 3" descr="image.png"/>
-          <p:cNvPicPr>
-            <a:picLocks noChangeAspect="1"/>
-          </p:cNvPicPr>
-          <p:nvPr/>
-        </p:nvPicPr>
-        <p:blipFill>
-          <a:blip r:embed="rId4"/>
-          <a:stretch>
-            <a:fillRect/>
-          </a:stretch>
-        </p:blipFill>
-        <p:spPr>
-          <a:xfrm>
-            <a:off x="1123950" y="5706516"/>
-            <a:ext cx="9944100" cy="929580"/>
-          </a:xfrm>
-          <a:prstGeom prst="rect">
-            <a:avLst/>
-          </a:prstGeom>
-        </p:spPr>
-      </p:pic>
-      <p:sp>
-        <p:nvSpPr>
-          <p:cNvPr id="5" name="TextBox 4"/>
+      <p:sp>
+        <p:nvSpPr>
+          <p:cNvPr id="2" name="TextBox 1"/>
           <p:cNvSpPr txBox="1"/>
           <p:nvPr/>
         </p:nvSpPr>
         <p:spPr>
           <a:xfrm>
-            <a:off x="571500" y="50601"/>
-            <a:ext cx="11601450" cy="533400"/>
+            <a:off x="548640" y="320040"/>
+            <a:ext cx="10972800" cy="365760"/>
           </a:xfrm>
           <a:prstGeom prst="rect">
             <a:avLst/>
@@ -5839,83 +4784,28 @@
           <a:noFill/>
         </p:spPr>
         <p:txBody>
-          <a:bodyPr wrap="square" lIns="0" rIns="0" tIns="0" bIns="0" anchor="t">
+          <a:bodyPr wrap="square">
             <a:spAutoFit/>
           </a:bodyPr>
           <a:lstStyle/>
           <a:p>
-            <a:pPr algn="l"/>
-            <a:r>
-              <a:rPr b="1" sz="3150" i="0" u="none">
-                <a:solidFill>
-                  <a:srgbClr val="2D3748"/>
-                </a:solidFill>
-                <a:latin typeface="Playfair Display"/>
-              </a:rPr>
-              <a:t>Tren Aktivitas Harian </a:t>
-            </a:r>
-            <a:r>
-              <a:rPr b="1" sz="3150" i="0" u="none">
-                <a:solidFill>
-                  <a:srgbClr val="C87A8A"/>
-                </a:solidFill>
-                <a:latin typeface="Playfair Display"/>
-              </a:rPr>
-              <a:t>(Intraday)</a:t>
-            </a:r>
-          </a:p>
-        </p:txBody>
-      </p:sp>
-    </p:spTree>
-  </p:cSld>
-  <p:clrMapOvr>
-    <a:masterClrMapping/>
-  </p:clrMapOvr>
-</p:sld>
-</file>
-
-<file path=ppt/slides/slide8.xml><?xml version="1.0" encoding="utf-8"?>
-<p:sld xmlns:a="http://schemas.openxmlformats.org/drawingml/2006/main" xmlns:p="http://schemas.openxmlformats.org/presentationml/2006/main" xmlns:r="http://schemas.openxmlformats.org/officeDocument/2006/relationships">
-  <p:cSld>
-    <p:bg>
-      <p:bgPr>
-        <a:solidFill>
-          <a:srgbClr val="FFFFFF"/>
-        </a:solidFill>
-        <a:effectLst/>
-      </p:bgPr>
-    </p:bg>
-    <p:spTree>
-      <p:nvGrpSpPr>
-        <p:cNvPr id="1" name=""/>
-        <p:cNvGrpSpPr/>
-        <p:nvPr/>
-      </p:nvGrpSpPr>
-      <p:grpSpPr/>
-      <p:pic>
-        <p:nvPicPr>
-          <p:cNvPr id="2" name="Picture 1" descr="image.png"/>
-          <p:cNvPicPr>
-            <a:picLocks noChangeAspect="1"/>
-          </p:cNvPicPr>
-          <p:nvPr/>
-        </p:nvPicPr>
-        <p:blipFill>
-          <a:blip r:embed="rId2"/>
-          <a:stretch>
-            <a:fillRect/>
-          </a:stretch>
-        </p:blipFill>
-        <p:spPr>
-          <a:xfrm>
-            <a:off x="0" y="0"/>
-            <a:ext cx="12192000" cy="6858000"/>
-          </a:xfrm>
-          <a:prstGeom prst="rect">
-            <a:avLst/>
-          </a:prstGeom>
-        </p:spPr>
-      </p:pic>
+            <a:pPr>
+              <a:spcAft>
+                <a:spcPts val="1000"/>
+              </a:spcAft>
+            </a:pPr>
+            <a:r>
+              <a:rPr sz="1100" b="1">
+                <a:solidFill>
+                  <a:srgbClr val="B85C74"/>
+                </a:solidFill>
+                <a:latin typeface="Calibri"/>
+              </a:rPr>
+              <a:t>REKOMENDASI</a:t>
+            </a:r>
+          </a:p>
+        </p:txBody>
+      </p:sp>
       <p:sp>
         <p:nvSpPr>
           <p:cNvPr id="3" name="TextBox 2"/>
@@ -5924,8 +4814,8 @@
         </p:nvSpPr>
         <p:spPr>
           <a:xfrm>
-            <a:off x="571500" y="2988915"/>
-            <a:ext cx="5238750" cy="1333500"/>
+            <a:off x="548640" y="640080"/>
+            <a:ext cx="11064240" cy="731520"/>
           </a:xfrm>
           <a:prstGeom prst="rect">
             <a:avLst/>
@@ -5933,341 +4823,24 @@
           <a:noFill/>
         </p:spPr>
         <p:txBody>
-          <a:bodyPr wrap="square" lIns="0" rIns="0" tIns="0" bIns="0" anchor="t">
+          <a:bodyPr wrap="square">
             <a:spAutoFit/>
           </a:bodyPr>
           <a:lstStyle/>
           <a:p>
-            <a:pPr algn="ctr">
-              <a:lnSpc>
-                <a:spcPts val="10500"/>
-              </a:lnSpc>
+            <a:pPr>
+              <a:spcAft>
+                <a:spcPts val="1000"/>
+              </a:spcAft>
             </a:pPr>
             <a:r>
-              <a:rPr b="1" sz="10500" i="0" u="none">
-                <a:solidFill>
-                  <a:srgbClr val="C87A8A"/>
-                </a:solidFill>
-                <a:latin typeface="Playfair Display"/>
-              </a:rPr>
-              <a:t>34%</a:t>
-            </a:r>
-          </a:p>
-        </p:txBody>
-      </p:sp>
-      <p:sp>
-        <p:nvSpPr>
-          <p:cNvPr id="4" name="TextBox 3"/>
-          <p:cNvSpPr txBox="1"/>
-          <p:nvPr/>
-        </p:nvSpPr>
-        <p:spPr>
-          <a:xfrm>
-            <a:off x="571500" y="4417665"/>
-            <a:ext cx="5238750" cy="365670"/>
-          </a:xfrm>
-          <a:prstGeom prst="rect">
-            <a:avLst/>
-          </a:prstGeom>
-          <a:noFill/>
-        </p:spPr>
-        <p:txBody>
-          <a:bodyPr wrap="square" lIns="0" rIns="0" tIns="0" bIns="0" anchor="t">
-            <a:spAutoFit/>
-          </a:bodyPr>
-          <a:lstStyle/>
-          <a:p>
-            <a:pPr algn="ctr">
-              <a:lnSpc>
-                <a:spcPts val="2879"/>
-              </a:lnSpc>
-            </a:pPr>
-            <a:r>
-              <a:rPr b="1" sz="1800" i="0" u="none">
-                <a:solidFill>
-                  <a:srgbClr val="2D3748"/>
-                </a:solidFill>
-                <a:latin typeface="DM Sans"/>
-              </a:rPr>
-              <a:t>DROP-OFF RATE (TIDUR)</a:t>
-            </a:r>
-          </a:p>
-        </p:txBody>
-      </p:sp>
-      <p:sp>
-        <p:nvSpPr>
-          <p:cNvPr id="5" name="TextBox 4"/>
-          <p:cNvSpPr txBox="1"/>
-          <p:nvPr/>
-        </p:nvSpPr>
-        <p:spPr>
-          <a:xfrm>
-            <a:off x="6381750" y="2492722"/>
-            <a:ext cx="5500687" cy="352425"/>
-          </a:xfrm>
-          <a:prstGeom prst="rect">
-            <a:avLst/>
-          </a:prstGeom>
-          <a:noFill/>
-        </p:spPr>
-        <p:txBody>
-          <a:bodyPr wrap="square" lIns="0" rIns="0" tIns="0" bIns="0" anchor="t">
-            <a:spAutoFit/>
-          </a:bodyPr>
-          <a:lstStyle/>
-          <a:p>
-            <a:pPr algn="l"/>
-            <a:r>
-              <a:rPr b="0" sz="2100" i="0" u="none">
-                <a:solidFill>
-                  <a:srgbClr val="2D3748"/>
-                </a:solidFill>
-                <a:latin typeface="Playfair Display SemiBold"/>
-              </a:rPr>
-              <a:t>Analisis Kenyamanan Perangkat</a:t>
-            </a:r>
-          </a:p>
-        </p:txBody>
-      </p:sp>
-      <p:sp>
-        <p:nvSpPr>
-          <p:cNvPr id="6" name="TextBox 5"/>
-          <p:cNvSpPr txBox="1"/>
-          <p:nvPr/>
-        </p:nvSpPr>
-        <p:spPr>
-          <a:xfrm>
-            <a:off x="6381750" y="3016597"/>
-            <a:ext cx="5238750" cy="822870"/>
-          </a:xfrm>
-          <a:prstGeom prst="rect">
-            <a:avLst/>
-          </a:prstGeom>
-          <a:noFill/>
-        </p:spPr>
-        <p:txBody>
-          <a:bodyPr wrap="square" lIns="0" rIns="0" tIns="0" bIns="0" anchor="t">
-            <a:spAutoFit/>
-          </a:bodyPr>
-          <a:lstStyle/>
-          <a:p>
-            <a:pPr algn="l">
-              <a:lnSpc>
-                <a:spcPts val="2160"/>
-              </a:lnSpc>
-            </a:pPr>
-            <a:r>
-              <a:rPr b="0" sz="1350" i="0" u="none">
-                <a:solidFill>
-                  <a:srgbClr val="4A5568"/>
-                </a:solidFill>
-                <a:latin typeface="DM Sans"/>
-              </a:rPr>
-              <a:t>Dari total 35 pengguna aktif, hanya 23 pengguna yang mempertahankan perangkat mereka saat tidur. Terjadi penurunan drastis sebesar 34% (12 pengguna).</a:t>
-            </a:r>
-          </a:p>
-        </p:txBody>
-      </p:sp>
-      <p:sp>
-        <p:nvSpPr>
-          <p:cNvPr id="7" name="TextBox 6"/>
-          <p:cNvSpPr txBox="1"/>
-          <p:nvPr/>
-        </p:nvSpPr>
-        <p:spPr>
-          <a:xfrm>
-            <a:off x="6381750" y="4010917"/>
-            <a:ext cx="5238750" cy="1097160"/>
-          </a:xfrm>
-          <a:prstGeom prst="rect">
-            <a:avLst/>
-          </a:prstGeom>
-          <a:noFill/>
-        </p:spPr>
-        <p:txBody>
-          <a:bodyPr wrap="square" lIns="0" rIns="0" tIns="0" bIns="0" anchor="t">
-            <a:spAutoFit/>
-          </a:bodyPr>
-          <a:lstStyle/>
-          <a:p>
-            <a:pPr algn="l">
-              <a:lnSpc>
-                <a:spcPts val="2160"/>
-              </a:lnSpc>
-            </a:pPr>
-            <a:r>
-              <a:rPr b="0" sz="1350" i="0" u="none">
-                <a:solidFill>
-                  <a:srgbClr val="4A5568"/>
-                </a:solidFill>
-                <a:latin typeface="DM Sans"/>
-              </a:rPr>
-              <a:t>Hal ini mengindikasikan bahwa </a:t>
-            </a:r>
-            <a:r>
-              <a:rPr b="0" sz="1350" i="1" u="none">
-                <a:solidFill>
-                  <a:srgbClr val="4A5568"/>
-                </a:solidFill>
-                <a:latin typeface="DM Sans"/>
-              </a:rPr>
-              <a:t>smartwatch</a:t>
-            </a:r>
-            <a:r>
-              <a:rPr b="0" sz="1350" i="0" u="none">
-                <a:solidFill>
-                  <a:srgbClr val="4A5568"/>
-                </a:solidFill>
-                <a:latin typeface="DM Sans"/>
-              </a:rPr>
-              <a:t> atau </a:t>
-            </a:r>
-            <a:r>
-              <a:rPr b="0" sz="1350" i="1" u="none">
-                <a:solidFill>
-                  <a:srgbClr val="4A5568"/>
-                </a:solidFill>
-                <a:latin typeface="DM Sans"/>
-              </a:rPr>
-              <a:t>fitness tracker</a:t>
-            </a:r>
-            <a:r>
-              <a:rPr b="0" sz="1350" i="0" u="none">
-                <a:solidFill>
-                  <a:srgbClr val="4A5568"/>
-                </a:solidFill>
-                <a:latin typeface="DM Sans"/>
-              </a:rPr>
-              <a:t> konvensional milik kompetitor seringkali tidak nyaman digunakan di tempat tidur, atau pengguna melepasnya untuk keperluan pengisian daya baterai.</a:t>
-            </a:r>
-          </a:p>
-        </p:txBody>
-      </p:sp>
-      <p:sp>
-        <p:nvSpPr>
-          <p:cNvPr id="8" name="TextBox 7"/>
-          <p:cNvSpPr txBox="1"/>
-          <p:nvPr/>
-        </p:nvSpPr>
-        <p:spPr>
-          <a:xfrm>
-            <a:off x="571500" y="571500"/>
-            <a:ext cx="11601450" cy="533400"/>
-          </a:xfrm>
-          <a:prstGeom prst="rect">
-            <a:avLst/>
-          </a:prstGeom>
-          <a:noFill/>
-        </p:spPr>
-        <p:txBody>
-          <a:bodyPr wrap="square" lIns="0" rIns="0" tIns="0" bIns="0" anchor="t">
-            <a:spAutoFit/>
-          </a:bodyPr>
-          <a:lstStyle/>
-          <a:p>
-            <a:pPr algn="l"/>
-            <a:r>
-              <a:rPr b="1" sz="3150" i="0" u="none">
-                <a:solidFill>
-                  <a:srgbClr val="2D3748"/>
-                </a:solidFill>
-                <a:latin typeface="Playfair Display"/>
-              </a:rPr>
-              <a:t>Penurunan Pelacakan </a:t>
-            </a:r>
-            <a:r>
-              <a:rPr b="1" sz="3150" i="0" u="none">
-                <a:solidFill>
-                  <a:srgbClr val="C87A8A"/>
-                </a:solidFill>
-                <a:latin typeface="Playfair Display"/>
-              </a:rPr>
-              <a:t>Malam Hari</a:t>
-            </a:r>
-          </a:p>
-        </p:txBody>
-      </p:sp>
-    </p:spTree>
-  </p:cSld>
-  <p:clrMapOvr>
-    <a:masterClrMapping/>
-  </p:clrMapOvr>
-</p:sld>
-</file>
-
-<file path=ppt/slides/slide9.xml><?xml version="1.0" encoding="utf-8"?>
-<p:sld xmlns:a="http://schemas.openxmlformats.org/drawingml/2006/main" xmlns:p="http://schemas.openxmlformats.org/presentationml/2006/main" xmlns:r="http://schemas.openxmlformats.org/officeDocument/2006/relationships">
-  <p:cSld>
-    <p:bg>
-      <p:bgPr>
-        <a:solidFill>
-          <a:srgbClr val="FFFFFF"/>
-        </a:solidFill>
-        <a:effectLst/>
-      </p:bgPr>
-    </p:bg>
-    <p:spTree>
-      <p:nvGrpSpPr>
-        <p:cNvPr id="1" name=""/>
-        <p:cNvGrpSpPr/>
-        <p:nvPr/>
-      </p:nvGrpSpPr>
-      <p:grpSpPr/>
-      <p:pic>
-        <p:nvPicPr>
-          <p:cNvPr id="2" name="Picture 1" descr="image.png"/>
-          <p:cNvPicPr>
-            <a:picLocks noChangeAspect="1"/>
-          </p:cNvPicPr>
-          <p:nvPr/>
-        </p:nvPicPr>
-        <p:blipFill>
-          <a:blip r:embed="rId2"/>
-          <a:stretch>
-            <a:fillRect/>
-          </a:stretch>
-        </p:blipFill>
-        <p:spPr>
-          <a:xfrm>
-            <a:off x="0" y="0"/>
-            <a:ext cx="12192000" cy="6858000"/>
-          </a:xfrm>
-          <a:prstGeom prst="rect">
-            <a:avLst/>
-          </a:prstGeom>
-        </p:spPr>
-      </p:pic>
-      <p:sp>
-        <p:nvSpPr>
-          <p:cNvPr id="3" name="TextBox 2"/>
-          <p:cNvSpPr txBox="1"/>
-          <p:nvPr/>
-        </p:nvSpPr>
-        <p:spPr>
-          <a:xfrm>
-            <a:off x="1820465" y="2306091"/>
-            <a:ext cx="8551068" cy="714375"/>
-          </a:xfrm>
-          <a:prstGeom prst="rect">
-            <a:avLst/>
-          </a:prstGeom>
-          <a:noFill/>
-        </p:spPr>
-        <p:txBody>
-          <a:bodyPr wrap="square" lIns="0" rIns="0" tIns="0" bIns="0" anchor="t">
-            <a:spAutoFit/>
-          </a:bodyPr>
-          <a:lstStyle/>
-          <a:p>
-            <a:pPr algn="ctr"/>
-            <a:r>
-              <a:rPr b="1" sz="4200" i="0" u="none">
-                <a:solidFill>
-                  <a:srgbClr val="2D3748"/>
-                </a:solidFill>
-                <a:latin typeface="Playfair Display"/>
-              </a:rPr>
-              <a:t>Rekomendasi Strategis (Fase Act)</a:t>
+              <a:rPr sz="2800" b="1">
+                <a:solidFill>
+                  <a:srgbClr val="1F2937"/>
+                </a:solidFill>
+                <a:latin typeface="Calibri"/>
+              </a:rPr>
+              <a:t>Tiga rekomendasi pemasaran</a:t>
             </a:r>
           </a:p>
         </p:txBody>
@@ -6280,19 +4853,18 @@
         </p:nvSpPr>
         <p:spPr>
           <a:xfrm>
-            <a:off x="5715000" y="3496716"/>
-            <a:ext cx="762000" cy="38100"/>
+            <a:off x="548640" y="1645920"/>
+            <a:ext cx="3520440" cy="4206240"/>
           </a:xfrm>
           <a:prstGeom prst="rect">
             <a:avLst/>
           </a:prstGeom>
           <a:solidFill>
-            <a:srgbClr val="C87A8A"/>
+            <a:srgbClr val="FBF4F6"/>
           </a:solidFill>
           <a:ln>
             <a:noFill/>
           </a:ln>
-          <a:effectLst/>
         </p:spPr>
         <p:style>
           <a:lnRef idx="1">
@@ -6324,8 +4896,8 @@
         </p:nvSpPr>
         <p:spPr>
           <a:xfrm>
-            <a:off x="2286000" y="3820566"/>
-            <a:ext cx="7620000" cy="731341"/>
+            <a:off x="777240" y="1828800"/>
+            <a:ext cx="3108960" cy="914400"/>
           </a:xfrm>
           <a:prstGeom prst="rect">
             <a:avLst/>
@@ -6333,24 +4905,627 @@
           <a:noFill/>
         </p:spPr>
         <p:txBody>
-          <a:bodyPr wrap="square" lIns="0" rIns="0" tIns="0" bIns="0" anchor="t">
+          <a:bodyPr wrap="square">
             <a:spAutoFit/>
           </a:bodyPr>
           <a:lstStyle/>
           <a:p>
-            <a:pPr algn="ctr">
-              <a:lnSpc>
-                <a:spcPts val="2879"/>
-              </a:lnSpc>
+            <a:pPr>
+              <a:spcAft>
+                <a:spcPts val="1000"/>
+              </a:spcAft>
             </a:pPr>
             <a:r>
-              <a:rPr b="0" sz="1800" i="0" u="none">
-                <a:solidFill>
-                  <a:srgbClr val="718096"/>
-                </a:solidFill>
-                <a:latin typeface="DM Sans"/>
-              </a:rPr>
-              <a:t>Menerjemahkan wawasan data analitik menjadi tiga pilar aksi nyata untuk mendorong pertumbuhan merek Bellabeat.</a:t>
+              <a:rPr sz="1800" b="1">
+                <a:solidFill>
+                  <a:srgbClr val="B85C74"/>
+                </a:solidFill>
+                <a:latin typeface="Calibri"/>
+              </a:rPr>
+              <a:t>1. Jual kebiasaan kecil, bukan olahraga</a:t>
+            </a:r>
+          </a:p>
+        </p:txBody>
+      </p:sp>
+      <p:sp>
+        <p:nvSpPr>
+          <p:cNvPr id="6" name="TextBox 5"/>
+          <p:cNvSpPr txBox="1"/>
+          <p:nvPr/>
+        </p:nvSpPr>
+        <p:spPr>
+          <a:xfrm>
+            <a:off x="777240" y="2834640"/>
+            <a:ext cx="3108960" cy="2926080"/>
+          </a:xfrm>
+          <a:prstGeom prst="rect">
+            <a:avLst/>
+          </a:prstGeom>
+          <a:noFill/>
+        </p:spPr>
+        <p:txBody>
+          <a:bodyPr wrap="square">
+            <a:spAutoFit/>
+          </a:bodyPr>
+          <a:lstStyle/>
+          <a:p>
+            <a:pPr>
+              <a:spcAft>
+                <a:spcPts val="1000"/>
+              </a:spcAft>
+            </a:pPr>
+            <a:r>
+              <a:rPr sz="1500" b="0">
+                <a:solidFill>
+                  <a:srgbClr val="1F2937"/>
+                </a:solidFill>
+                <a:latin typeface="Calibri"/>
+              </a:rPr>
+              <a:t>Kelompok terbesar (35%) adalah pengguna sedentary. Posisikan produk seperti botol Spring sebagai alat kebiasaan harian (minum air, jalan singkat).</a:t>
+            </a:r>
+          </a:p>
+        </p:txBody>
+      </p:sp>
+      <p:sp>
+        <p:nvSpPr>
+          <p:cNvPr id="7" name="Rectangle 6"/>
+          <p:cNvSpPr/>
+          <p:nvPr/>
+        </p:nvSpPr>
+        <p:spPr>
+          <a:xfrm>
+            <a:off x="4297679" y="1645920"/>
+            <a:ext cx="3520440" cy="4206240"/>
+          </a:xfrm>
+          <a:prstGeom prst="rect">
+            <a:avLst/>
+          </a:prstGeom>
+          <a:solidFill>
+            <a:srgbClr val="FBF4F6"/>
+          </a:solidFill>
+          <a:ln>
+            <a:noFill/>
+          </a:ln>
+        </p:spPr>
+        <p:style>
+          <a:lnRef idx="1">
+            <a:schemeClr val="accent1"/>
+          </a:lnRef>
+          <a:fillRef idx="3">
+            <a:schemeClr val="accent1"/>
+          </a:fillRef>
+          <a:effectRef idx="2">
+            <a:schemeClr val="accent1"/>
+          </a:effectRef>
+          <a:fontRef idx="minor">
+            <a:schemeClr val="lt1"/>
+          </a:fontRef>
+        </p:style>
+        <p:txBody>
+          <a:bodyPr rtlCol="0" anchor="ctr"/>
+          <a:lstStyle/>
+          <a:p>
+            <a:pPr algn="ctr"/>
+          </a:p>
+        </p:txBody>
+      </p:sp>
+      <p:sp>
+        <p:nvSpPr>
+          <p:cNvPr id="8" name="TextBox 7"/>
+          <p:cNvSpPr txBox="1"/>
+          <p:nvPr/>
+        </p:nvSpPr>
+        <p:spPr>
+          <a:xfrm>
+            <a:off x="4526279" y="1828800"/>
+            <a:ext cx="3108960" cy="914400"/>
+          </a:xfrm>
+          <a:prstGeom prst="rect">
+            <a:avLst/>
+          </a:prstGeom>
+          <a:noFill/>
+        </p:spPr>
+        <p:txBody>
+          <a:bodyPr wrap="square">
+            <a:spAutoFit/>
+          </a:bodyPr>
+          <a:lstStyle/>
+          <a:p>
+            <a:pPr>
+              <a:spcAft>
+                <a:spcPts val="1000"/>
+              </a:spcAft>
+            </a:pPr>
+            <a:r>
+              <a:rPr sz="1800" b="1">
+                <a:solidFill>
+                  <a:srgbClr val="B85C74"/>
+                </a:solidFill>
+                <a:latin typeface="Calibri"/>
+              </a:rPr>
+              <a:t>2. Manfaatkan hari pasif</a:t>
+            </a:r>
+          </a:p>
+        </p:txBody>
+      </p:sp>
+      <p:sp>
+        <p:nvSpPr>
+          <p:cNvPr id="9" name="TextBox 8"/>
+          <p:cNvSpPr txBox="1"/>
+          <p:nvPr/>
+        </p:nvSpPr>
+        <p:spPr>
+          <a:xfrm>
+            <a:off x="4526279" y="2834640"/>
+            <a:ext cx="3108960" cy="2926080"/>
+          </a:xfrm>
+          <a:prstGeom prst="rect">
+            <a:avLst/>
+          </a:prstGeom>
+          <a:noFill/>
+        </p:spPr>
+        <p:txBody>
+          <a:bodyPr wrap="square">
+            <a:spAutoFit/>
+          </a:bodyPr>
+          <a:lstStyle/>
+          <a:p>
+            <a:pPr>
+              <a:spcAft>
+                <a:spcPts val="1000"/>
+              </a:spcAft>
+            </a:pPr>
+            <a:r>
+              <a:rPr sz="1500" b="0">
+                <a:solidFill>
+                  <a:srgbClr val="1F2937"/>
+                </a:solidFill>
+                <a:latin typeface="Calibri"/>
+              </a:rPr>
+              <a:t>Kirim pengingat atau tantangan langkah pada hari Selasa, saat rata-rata langkah paling rendah (5.980).</a:t>
+            </a:r>
+          </a:p>
+        </p:txBody>
+      </p:sp>
+      <p:sp>
+        <p:nvSpPr>
+          <p:cNvPr id="10" name="Rectangle 9"/>
+          <p:cNvSpPr/>
+          <p:nvPr/>
+        </p:nvSpPr>
+        <p:spPr>
+          <a:xfrm>
+            <a:off x="8046719" y="1645920"/>
+            <a:ext cx="3520440" cy="4206240"/>
+          </a:xfrm>
+          <a:prstGeom prst="rect">
+            <a:avLst/>
+          </a:prstGeom>
+          <a:solidFill>
+            <a:srgbClr val="FBF4F6"/>
+          </a:solidFill>
+          <a:ln>
+            <a:noFill/>
+          </a:ln>
+        </p:spPr>
+        <p:style>
+          <a:lnRef idx="1">
+            <a:schemeClr val="accent1"/>
+          </a:lnRef>
+          <a:fillRef idx="3">
+            <a:schemeClr val="accent1"/>
+          </a:fillRef>
+          <a:effectRef idx="2">
+            <a:schemeClr val="accent1"/>
+          </a:effectRef>
+          <a:fontRef idx="minor">
+            <a:schemeClr val="lt1"/>
+          </a:fontRef>
+        </p:style>
+        <p:txBody>
+          <a:bodyPr rtlCol="0" anchor="ctr"/>
+          <a:lstStyle/>
+          <a:p>
+            <a:pPr algn="ctr"/>
+          </a:p>
+        </p:txBody>
+      </p:sp>
+      <p:sp>
+        <p:nvSpPr>
+          <p:cNvPr id="11" name="TextBox 10"/>
+          <p:cNvSpPr txBox="1"/>
+          <p:nvPr/>
+        </p:nvSpPr>
+        <p:spPr>
+          <a:xfrm>
+            <a:off x="8275319" y="1828800"/>
+            <a:ext cx="3108960" cy="914400"/>
+          </a:xfrm>
+          <a:prstGeom prst="rect">
+            <a:avLst/>
+          </a:prstGeom>
+          <a:noFill/>
+        </p:spPr>
+        <p:txBody>
+          <a:bodyPr wrap="square">
+            <a:spAutoFit/>
+          </a:bodyPr>
+          <a:lstStyle/>
+          <a:p>
+            <a:pPr>
+              <a:spcAft>
+                <a:spcPts val="1000"/>
+              </a:spcAft>
+            </a:pPr>
+            <a:r>
+              <a:rPr sz="1800" b="1">
+                <a:solidFill>
+                  <a:srgbClr val="B85C74"/>
+                </a:solidFill>
+                <a:latin typeface="Calibri"/>
+              </a:rPr>
+              <a:t>3. Tonjolkan kenyamanan</a:t>
+            </a:r>
+          </a:p>
+        </p:txBody>
+      </p:sp>
+      <p:sp>
+        <p:nvSpPr>
+          <p:cNvPr id="12" name="TextBox 11"/>
+          <p:cNvSpPr txBox="1"/>
+          <p:nvPr/>
+        </p:nvSpPr>
+        <p:spPr>
+          <a:xfrm>
+            <a:off x="8275319" y="2834640"/>
+            <a:ext cx="3108960" cy="2926080"/>
+          </a:xfrm>
+          <a:prstGeom prst="rect">
+            <a:avLst/>
+          </a:prstGeom>
+          <a:noFill/>
+        </p:spPr>
+        <p:txBody>
+          <a:bodyPr wrap="square">
+            <a:spAutoFit/>
+          </a:bodyPr>
+          <a:lstStyle/>
+          <a:p>
+            <a:pPr>
+              <a:spcAft>
+                <a:spcPts val="1000"/>
+              </a:spcAft>
+            </a:pPr>
+            <a:r>
+              <a:rPr sz="1500" b="0">
+                <a:solidFill>
+                  <a:srgbClr val="1F2937"/>
+                </a:solidFill>
+                <a:latin typeface="Calibri"/>
+              </a:rPr>
+              <a:t>13% hari alat tidak dipakai dan data tidur sering kosong. Promosikan Leaf sebagai klip ringan yang nyaman dipakai seharian dan saat tidur.</a:t>
+            </a:r>
+          </a:p>
+        </p:txBody>
+      </p:sp>
+    </p:spTree>
+  </p:cSld>
+  <p:clrMapOvr>
+    <a:masterClrMapping/>
+  </p:clrMapOvr>
+</p:sld>
+</file>
+
+<file path=ppt/slides/slide8.xml><?xml version="1.0" encoding="utf-8"?>
+<p:sld xmlns:a="http://schemas.openxmlformats.org/drawingml/2006/main" xmlns:p="http://schemas.openxmlformats.org/presentationml/2006/main" xmlns:r="http://schemas.openxmlformats.org/officeDocument/2006/relationships">
+  <p:cSld>
+    <p:spTree>
+      <p:nvGrpSpPr>
+        <p:cNvPr id="1" name=""/>
+        <p:cNvGrpSpPr/>
+        <p:nvPr/>
+      </p:nvGrpSpPr>
+      <p:grpSpPr/>
+      <p:sp>
+        <p:nvSpPr>
+          <p:cNvPr id="2" name="TextBox 1"/>
+          <p:cNvSpPr txBox="1"/>
+          <p:nvPr/>
+        </p:nvSpPr>
+        <p:spPr>
+          <a:xfrm>
+            <a:off x="548640" y="320040"/>
+            <a:ext cx="10972800" cy="365760"/>
+          </a:xfrm>
+          <a:prstGeom prst="rect">
+            <a:avLst/>
+          </a:prstGeom>
+          <a:noFill/>
+        </p:spPr>
+        <p:txBody>
+          <a:bodyPr wrap="square">
+            <a:spAutoFit/>
+          </a:bodyPr>
+          <a:lstStyle/>
+          <a:p>
+            <a:pPr>
+              <a:spcAft>
+                <a:spcPts val="1000"/>
+              </a:spcAft>
+            </a:pPr>
+            <a:r>
+              <a:rPr sz="1100" b="1">
+                <a:solidFill>
+                  <a:srgbClr val="B85C74"/>
+                </a:solidFill>
+                <a:latin typeface="Calibri"/>
+              </a:rPr>
+              <a:t>CARA MEMBACA HASIL</a:t>
+            </a:r>
+          </a:p>
+        </p:txBody>
+      </p:sp>
+      <p:sp>
+        <p:nvSpPr>
+          <p:cNvPr id="3" name="TextBox 2"/>
+          <p:cNvSpPr txBox="1"/>
+          <p:nvPr/>
+        </p:nvSpPr>
+        <p:spPr>
+          <a:xfrm>
+            <a:off x="548640" y="640080"/>
+            <a:ext cx="11064240" cy="731520"/>
+          </a:xfrm>
+          <a:prstGeom prst="rect">
+            <a:avLst/>
+          </a:prstGeom>
+          <a:noFill/>
+        </p:spPr>
+        <p:txBody>
+          <a:bodyPr wrap="square">
+            <a:spAutoFit/>
+          </a:bodyPr>
+          <a:lstStyle/>
+          <a:p>
+            <a:pPr>
+              <a:spcAft>
+                <a:spcPts val="1000"/>
+              </a:spcAft>
+            </a:pPr>
+            <a:r>
+              <a:rPr sz="2800" b="1">
+                <a:solidFill>
+                  <a:srgbClr val="1F2937"/>
+                </a:solidFill>
+                <a:latin typeface="Calibri"/>
+              </a:rPr>
+              <a:t>Keterbatasan</a:t>
+            </a:r>
+          </a:p>
+        </p:txBody>
+      </p:sp>
+      <p:sp>
+        <p:nvSpPr>
+          <p:cNvPr id="4" name="TextBox 3"/>
+          <p:cNvSpPr txBox="1"/>
+          <p:nvPr/>
+        </p:nvSpPr>
+        <p:spPr>
+          <a:xfrm>
+            <a:off x="548640" y="1645920"/>
+            <a:ext cx="10972800" cy="4572000"/>
+          </a:xfrm>
+          <a:prstGeom prst="rect">
+            <a:avLst/>
+          </a:prstGeom>
+          <a:noFill/>
+        </p:spPr>
+        <p:txBody>
+          <a:bodyPr wrap="square">
+            <a:spAutoFit/>
+          </a:bodyPr>
+          <a:lstStyle/>
+          <a:p>
+            <a:pPr>
+              <a:spcAft>
+                <a:spcPts val="1000"/>
+              </a:spcAft>
+            </a:pPr>
+            <a:r>
+              <a:rPr sz="1700" b="0">
+                <a:solidFill>
+                  <a:srgbClr val="1F2937"/>
+                </a:solidFill>
+                <a:latin typeface="Calibri"/>
+              </a:rPr>
+              <a:t>Sampel kecil: 35 pengguna, rata-rata 13 hari per pengguna, tanpa data demografi.</a:t>
+            </a:r>
+          </a:p>
+          <a:p>
+            <a:pPr>
+              <a:spcAft>
+                <a:spcPts val="1000"/>
+              </a:spcAft>
+            </a:pPr>
+            <a:r>
+              <a:rPr sz="1700" b="0">
+                <a:solidFill>
+                  <a:srgbClr val="1F2937"/>
+                </a:solidFill>
+                <a:latin typeface="Calibri"/>
+              </a:rPr>
+              <a:t>Pengguna Fitbit ini belum tentu mewakili target pasar Bellabeat (perempuan).</a:t>
+            </a:r>
+          </a:p>
+          <a:p>
+            <a:pPr>
+              <a:spcAft>
+                <a:spcPts val="1000"/>
+              </a:spcAft>
+            </a:pPr>
+            <a:r>
+              <a:rPr sz="1700" b="0">
+                <a:solidFill>
+                  <a:srgbClr val="1F2937"/>
+                </a:solidFill>
+                <a:latin typeface="Calibri"/>
+              </a:rPr>
+              <a:t>Pola per jam dan data tidur berasal dari tabel lain di dataset yang sama dan tidak disertakan di repo ini; angka tersebut perlu diverifikasi ulang sebelum dipakai untuk menjadwalkan kampanye.</a:t>
+            </a:r>
+          </a:p>
+          <a:p>
+            <a:pPr>
+              <a:spcAft>
+                <a:spcPts val="1000"/>
+              </a:spcAft>
+            </a:pPr>
+            <a:r>
+              <a:rPr sz="1700" b="0">
+                <a:solidFill>
+                  <a:srgbClr val="1F2937"/>
+                </a:solidFill>
+                <a:latin typeface="Calibri"/>
+              </a:rPr>
+              <a:t>Rekomendasi bersifat arah dan sebaiknya diuji, misalnya dengan A/B test waktu notifikasi.</a:t>
+            </a:r>
+          </a:p>
+        </p:txBody>
+      </p:sp>
+    </p:spTree>
+  </p:cSld>
+  <p:clrMapOvr>
+    <a:masterClrMapping/>
+  </p:clrMapOvr>
+</p:sld>
+</file>
+
+<file path=ppt/slides/slide9.xml><?xml version="1.0" encoding="utf-8"?>
+<p:sld xmlns:a="http://schemas.openxmlformats.org/drawingml/2006/main" xmlns:p="http://schemas.openxmlformats.org/presentationml/2006/main" xmlns:r="http://schemas.openxmlformats.org/officeDocument/2006/relationships">
+  <p:cSld>
+    <p:spTree>
+      <p:nvGrpSpPr>
+        <p:cNvPr id="1" name=""/>
+        <p:cNvGrpSpPr/>
+        <p:nvPr/>
+      </p:nvGrpSpPr>
+      <p:grpSpPr/>
+      <p:sp>
+        <p:nvSpPr>
+          <p:cNvPr id="2" name="Rectangle 1"/>
+          <p:cNvSpPr/>
+          <p:nvPr/>
+        </p:nvSpPr>
+        <p:spPr>
+          <a:xfrm>
+            <a:off x="0" y="0"/>
+            <a:ext cx="12191695" cy="6858000"/>
+          </a:xfrm>
+          <a:prstGeom prst="rect">
+            <a:avLst/>
+          </a:prstGeom>
+          <a:solidFill>
+            <a:srgbClr val="FBF4F6"/>
+          </a:solidFill>
+          <a:ln>
+            <a:noFill/>
+          </a:ln>
+        </p:spPr>
+        <p:style>
+          <a:lnRef idx="1">
+            <a:schemeClr val="accent1"/>
+          </a:lnRef>
+          <a:fillRef idx="3">
+            <a:schemeClr val="accent1"/>
+          </a:fillRef>
+          <a:effectRef idx="2">
+            <a:schemeClr val="accent1"/>
+          </a:effectRef>
+          <a:fontRef idx="minor">
+            <a:schemeClr val="lt1"/>
+          </a:fontRef>
+        </p:style>
+        <p:txBody>
+          <a:bodyPr rtlCol="0" anchor="ctr"/>
+          <a:lstStyle/>
+          <a:p>
+            <a:pPr algn="ctr"/>
+          </a:p>
+        </p:txBody>
+      </p:sp>
+      <p:sp>
+        <p:nvSpPr>
+          <p:cNvPr id="3" name="TextBox 2"/>
+          <p:cNvSpPr txBox="1"/>
+          <p:nvPr/>
+        </p:nvSpPr>
+        <p:spPr>
+          <a:xfrm>
+            <a:off x="822960" y="2743200"/>
+            <a:ext cx="10515600" cy="914400"/>
+          </a:xfrm>
+          <a:prstGeom prst="rect">
+            <a:avLst/>
+          </a:prstGeom>
+          <a:noFill/>
+        </p:spPr>
+        <p:txBody>
+          <a:bodyPr wrap="square">
+            <a:spAutoFit/>
+          </a:bodyPr>
+          <a:lstStyle/>
+          <a:p>
+            <a:pPr>
+              <a:spcAft>
+                <a:spcPts val="1000"/>
+              </a:spcAft>
+            </a:pPr>
+            <a:r>
+              <a:rPr sz="4000" b="1">
+                <a:solidFill>
+                  <a:srgbClr val="1F2937"/>
+                </a:solidFill>
+                <a:latin typeface="Calibri"/>
+              </a:rPr>
+              <a:t>Terima kasih</a:t>
+            </a:r>
+          </a:p>
+        </p:txBody>
+      </p:sp>
+      <p:sp>
+        <p:nvSpPr>
+          <p:cNvPr id="4" name="TextBox 3"/>
+          <p:cNvSpPr txBox="1"/>
+          <p:nvPr/>
+        </p:nvSpPr>
+        <p:spPr>
+          <a:xfrm>
+            <a:off x="822960" y="3657600"/>
+            <a:ext cx="10515600" cy="548640"/>
+          </a:xfrm>
+          <a:prstGeom prst="rect">
+            <a:avLst/>
+          </a:prstGeom>
+          <a:noFill/>
+        </p:spPr>
+        <p:txBody>
+          <a:bodyPr wrap="square">
+            <a:spAutoFit/>
+          </a:bodyPr>
+          <a:lstStyle/>
+          <a:p>
+            <a:pPr>
+              <a:spcAft>
+                <a:spcPts val="1000"/>
+              </a:spcAft>
+            </a:pPr>
+            <a:r>
+              <a:rPr sz="1600" b="0">
+                <a:solidFill>
+                  <a:srgbClr val="6B7280"/>
+                </a:solidFill>
+                <a:latin typeface="Calibri"/>
+              </a:rPr>
+              <a:t>Novaldi Ramadhan Waluyo · github.com/Achimedes28</a:t>
             </a:r>
           </a:p>
         </p:txBody>
